--- a/out/ppt/WISE_L02_수업.pptx
+++ b/out/ppt/WISE_L02_수업.pptx
@@ -16,6 +16,11 @@
     <p:sldId id="264" r:id="rId16"/>
     <p:sldId id="265" r:id="rId17"/>
     <p:sldId id="266" r:id="rId18"/>
+    <p:sldId id="267" r:id="rId19"/>
+    <p:sldId id="268" r:id="rId20"/>
+    <p:sldId id="269" r:id="rId21"/>
+    <p:sldId id="270" r:id="rId22"/>
+    <p:sldId id="271" r:id="rId23"/>
   </p:sldIdLst>
   <p:sldSz cx="12191695" cy="6858000" type="screen4x3"/>
   <p:notesSz cx="6858000" cy="9144000"/>
@@ -587,28 +592,23 @@
           <a:lstStyle/>
           <a:p>
             <a:r>
-              <a:t>◎ 다음 차시 예고</a:t>
-            </a:r>
-          </a:p>
-          <a:p>
-            <a:r>
-              <a:t>- 다음 시간에는 AI의 답에 숨은 치우침을 찾아봅시다.</a:t>
+              <a:t>3단계 · 12분</a:t>
+            </a:r>
+          </a:p>
+          <a:p>
+            <a:r>
+              <a:t>교과서와 공공 누리집에서 가져온 근거 자료가 앱 안에 들어 있다. 출처 확인, 자료 대조, 내 말로 정리의 3단계를 밟아 판정한다.</a:t>
             </a:r>
           </a:p>
           <a:p/>
           <a:p>
             <a:r>
-              <a:t>준비물</a:t>
-            </a:r>
-          </a:p>
-          <a:p>
-            <a:r>
-              <a:t>★ 배움 공책</a:t>
-            </a:r>
-          </a:p>
-          <a:p>
-            <a:r>
-              <a:t>△ 검증 3단계를 교실 게시물로 남기기</a:t>
+              <a:t>발문 : 확인해 보니 무엇이 달라졌나요?</a:t>
+            </a:r>
+          </a:p>
+          <a:p>
+            <a:r>
+              <a:t>예상 답변 : 믿을 수 있는 부분과 아닌 부분을 나눌 수 있게 되었습니다.</a:t>
             </a:r>
           </a:p>
         </p:txBody>
@@ -678,6 +678,455 @@
           <a:lstStyle/>
           <a:p>
             <a:r>
+              <a:t>4단계 · 7분</a:t>
+            </a:r>
+          </a:p>
+          <a:p>
+            <a:r>
+              <a:t>찾아낸 환각을 카드 두 장에 적는다. 무엇이 틀렸는지와 어떻게 확인했는지를 함께 쓴다.</a:t>
+            </a:r>
+          </a:p>
+          <a:p/>
+          <a:p>
+            <a:r>
+              <a:t>발문 : 이 답이 틀렸다는 것을 어떻게 알아냈나요?</a:t>
+            </a:r>
+          </a:p>
+          <a:p>
+            <a:r>
+              <a:t>예상 답변 : AI가 말한 출처를 찾아보니 그런 자료가 없었습니다.</a:t>
+            </a:r>
+          </a:p>
+        </p:txBody>
+      </p:sp>
+      <p:sp>
+        <p:nvSpPr>
+          <p:cNvPr id="4" name="Slide Number Placeholder 3"/>
+          <p:cNvSpPr>
+            <a:spLocks noGrp="1"/>
+          </p:cNvSpPr>
+          <p:nvPr>
+            <p:ph type="sldNum" idx="5" sz="quarter"/>
+          </p:nvPr>
+        </p:nvSpPr>
+        <p:spPr/>
+      </p:sp>
+    </p:spTree>
+  </p:cSld>
+  <p:clrMapOvr>
+    <a:masterClrMapping/>
+  </p:clrMapOvr>
+</p:notes>
+</file>
+
+<file path=ppt/notesSlides/notesSlide12.xml><?xml version="1.0" encoding="utf-8"?>
+<p:notes xmlns:a="http://schemas.openxmlformats.org/drawingml/2006/main" xmlns:p="http://schemas.openxmlformats.org/presentationml/2006/main" xmlns:r="http://schemas.openxmlformats.org/officeDocument/2006/relationships">
+  <p:cSld>
+    <p:spTree>
+      <p:nvGrpSpPr>
+        <p:cNvPr id="1" name=""/>
+        <p:cNvGrpSpPr/>
+        <p:nvPr/>
+      </p:nvGrpSpPr>
+      <p:grpSpPr>
+        <a:xfrm>
+          <a:off x="0" y="0"/>
+          <a:ext cx="0" cy="0"/>
+          <a:chOff x="0" y="0"/>
+          <a:chExt cx="0" cy="0"/>
+        </a:xfrm>
+      </p:grpSpPr>
+      <p:sp>
+        <p:nvSpPr>
+          <p:cNvPr id="2" name="Slide Image Placeholder 1"/>
+          <p:cNvSpPr>
+            <a:spLocks noGrp="1"/>
+          </p:cNvSpPr>
+          <p:nvPr>
+            <p:ph type="sldImg" idx="2"/>
+          </p:nvPr>
+        </p:nvSpPr>
+        <p:spPr/>
+      </p:sp>
+      <p:sp>
+        <p:nvSpPr>
+          <p:cNvPr id="3" name="Notes Placeholder 2"/>
+          <p:cNvSpPr>
+            <a:spLocks noGrp="1"/>
+          </p:cNvSpPr>
+          <p:nvPr>
+            <p:ph type="body" idx="3" sz="quarter"/>
+          </p:nvPr>
+        </p:nvSpPr>
+        <p:spPr/>
+        <p:txBody>
+          <a:bodyPr/>
+          <a:lstStyle/>
+          <a:p>
+            <a:r>
+              <a:t>5단계 · 5분</a:t>
+            </a:r>
+          </a:p>
+          <a:p>
+            <a:r>
+              <a:t>내 판정과 실제 판정을 맞춰 보고 학급 집계를 함께 본다. 배운 것을 한 문장으로 남긴다.</a:t>
+            </a:r>
+          </a:p>
+          <a:p/>
+          <a:p>
+            <a:r>
+              <a:t>발문 : AI의 답을 받았을 때 가장 먼저 할 일은 무엇인가요?</a:t>
+            </a:r>
+          </a:p>
+          <a:p>
+            <a:r>
+              <a:t>예상 답변 : 어디서 나온 이야기인지 출처를 확인하는 일입니다.</a:t>
+            </a:r>
+          </a:p>
+        </p:txBody>
+      </p:sp>
+      <p:sp>
+        <p:nvSpPr>
+          <p:cNvPr id="4" name="Slide Number Placeholder 3"/>
+          <p:cNvSpPr>
+            <a:spLocks noGrp="1"/>
+          </p:cNvSpPr>
+          <p:nvPr>
+            <p:ph type="sldNum" idx="5" sz="quarter"/>
+          </p:nvPr>
+        </p:nvSpPr>
+        <p:spPr/>
+      </p:sp>
+    </p:spTree>
+  </p:cSld>
+  <p:clrMapOvr>
+    <a:masterClrMapping/>
+  </p:clrMapOvr>
+</p:notes>
+</file>
+
+<file path=ppt/notesSlides/notesSlide13.xml><?xml version="1.0" encoding="utf-8"?>
+<p:notes xmlns:a="http://schemas.openxmlformats.org/drawingml/2006/main" xmlns:p="http://schemas.openxmlformats.org/presentationml/2006/main" xmlns:r="http://schemas.openxmlformats.org/officeDocument/2006/relationships">
+  <p:cSld>
+    <p:spTree>
+      <p:nvGrpSpPr>
+        <p:cNvPr id="1" name=""/>
+        <p:cNvGrpSpPr/>
+        <p:nvPr/>
+      </p:nvGrpSpPr>
+      <p:grpSpPr>
+        <a:xfrm>
+          <a:off x="0" y="0"/>
+          <a:ext cx="0" cy="0"/>
+          <a:chOff x="0" y="0"/>
+          <a:chExt cx="0" cy="0"/>
+        </a:xfrm>
+      </p:grpSpPr>
+      <p:sp>
+        <p:nvSpPr>
+          <p:cNvPr id="2" name="Slide Image Placeholder 1"/>
+          <p:cNvSpPr>
+            <a:spLocks noGrp="1"/>
+          </p:cNvSpPr>
+          <p:nvPr>
+            <p:ph type="sldImg" idx="2"/>
+          </p:nvPr>
+        </p:nvSpPr>
+        <p:spPr/>
+      </p:sp>
+      <p:sp>
+        <p:nvSpPr>
+          <p:cNvPr id="3" name="Notes Placeholder 2"/>
+          <p:cNvSpPr>
+            <a:spLocks noGrp="1"/>
+          </p:cNvSpPr>
+          <p:nvPr>
+            <p:ph type="body" idx="3" sz="quarter"/>
+          </p:nvPr>
+        </p:nvSpPr>
+        <p:spPr/>
+        <p:txBody>
+          <a:bodyPr/>
+          <a:lstStyle/>
+          <a:p>
+            <a:r>
+              <a:t>1인 1기기가 아니어도 모두 참여하게 한다.</a:t>
+            </a:r>
+          </a:p>
+          <a:p>
+            <a:r>
+              <a:t>사실 확인이 가능한 질문으로만 한정한다. 이 앱은 그런 질문 다섯 개만 담고 있다.</a:t>
+            </a:r>
+          </a:p>
+          <a:p>
+            <a:r>
+              <a:t>개인 이름을 넣어 검색하지 않는다. 이 앱에서는 학생이 직접 질문을 넣지 않는다.</a:t>
+            </a:r>
+          </a:p>
+          <a:p>
+            <a:r>
+              <a:t>특정 서비스 비방으로 흐르지 않게 한다. 도구 이름을 가 나로만 적었다.</a:t>
+            </a:r>
+          </a:p>
+          <a:p>
+            <a:r>
+              <a:t>답이 갈리는 문항은 질문이 흐릿해서 갈린다는 점을 짚는다. 틀린 것과 다른 것은 다르다.</a:t>
+            </a:r>
+          </a:p>
+        </p:txBody>
+      </p:sp>
+      <p:sp>
+        <p:nvSpPr>
+          <p:cNvPr id="4" name="Slide Number Placeholder 3"/>
+          <p:cNvSpPr>
+            <a:spLocks noGrp="1"/>
+          </p:cNvSpPr>
+          <p:nvPr>
+            <p:ph type="sldNum" idx="5" sz="quarter"/>
+          </p:nvPr>
+        </p:nvSpPr>
+        <p:spPr/>
+      </p:sp>
+    </p:spTree>
+  </p:cSld>
+  <p:clrMapOvr>
+    <a:masterClrMapping/>
+  </p:clrMapOvr>
+</p:notes>
+</file>
+
+<file path=ppt/notesSlides/notesSlide14.xml><?xml version="1.0" encoding="utf-8"?>
+<p:notes xmlns:a="http://schemas.openxmlformats.org/drawingml/2006/main" xmlns:p="http://schemas.openxmlformats.org/presentationml/2006/main" xmlns:r="http://schemas.openxmlformats.org/officeDocument/2006/relationships">
+  <p:cSld>
+    <p:spTree>
+      <p:nvGrpSpPr>
+        <p:cNvPr id="1" name=""/>
+        <p:cNvGrpSpPr/>
+        <p:nvPr/>
+      </p:nvGrpSpPr>
+      <p:grpSpPr>
+        <a:xfrm>
+          <a:off x="0" y="0"/>
+          <a:ext cx="0" cy="0"/>
+          <a:chOff x="0" y="0"/>
+          <a:chExt cx="0" cy="0"/>
+        </a:xfrm>
+      </p:grpSpPr>
+      <p:sp>
+        <p:nvSpPr>
+          <p:cNvPr id="2" name="Slide Image Placeholder 1"/>
+          <p:cNvSpPr>
+            <a:spLocks noGrp="1"/>
+          </p:cNvSpPr>
+          <p:nvPr>
+            <p:ph type="sldImg" idx="2"/>
+          </p:nvPr>
+        </p:nvSpPr>
+        <p:spPr/>
+      </p:sp>
+      <p:sp>
+        <p:nvSpPr>
+          <p:cNvPr id="3" name="Notes Placeholder 2"/>
+          <p:cNvSpPr>
+            <a:spLocks noGrp="1"/>
+          </p:cNvSpPr>
+          <p:nvPr>
+            <p:ph type="body" idx="3" sz="quarter"/>
+          </p:nvPr>
+        </p:nvSpPr>
+        <p:spPr/>
+        <p:txBody>
+          <a:bodyPr/>
+          <a:lstStyle/>
+          <a:p>
+            <a:r>
+              <a:t>◎ 배움 정리</a:t>
+            </a:r>
+          </a:p>
+          <a:p>
+            <a:r>
+              <a:t>- AI의 답을 받았을 때 가장 먼저 할 일은 무엇인가요?</a:t>
+            </a:r>
+          </a:p>
+          <a:p>
+            <a:r>
+              <a:t>  · 어디서 나온 이야기인지 출처를 확인하는 일입니다.</a:t>
+            </a:r>
+          </a:p>
+          <a:p/>
+          <a:p>
+            <a:r>
+              <a:t>준비물</a:t>
+            </a:r>
+          </a:p>
+          <a:p>
+            <a:r>
+              <a:t>★ 배움 공책</a:t>
+            </a:r>
+          </a:p>
+          <a:p>
+            <a:r>
+              <a:t>△ 검증 3단계를 교실 게시물로 남기기</a:t>
+            </a:r>
+          </a:p>
+        </p:txBody>
+      </p:sp>
+      <p:sp>
+        <p:nvSpPr>
+          <p:cNvPr id="4" name="Slide Number Placeholder 3"/>
+          <p:cNvSpPr>
+            <a:spLocks noGrp="1"/>
+          </p:cNvSpPr>
+          <p:nvPr>
+            <p:ph type="sldNum" idx="5" sz="quarter"/>
+          </p:nvPr>
+        </p:nvSpPr>
+        <p:spPr/>
+      </p:sp>
+    </p:spTree>
+  </p:cSld>
+  <p:clrMapOvr>
+    <a:masterClrMapping/>
+  </p:clrMapOvr>
+</p:notes>
+</file>
+
+<file path=ppt/notesSlides/notesSlide15.xml><?xml version="1.0" encoding="utf-8"?>
+<p:notes xmlns:a="http://schemas.openxmlformats.org/drawingml/2006/main" xmlns:p="http://schemas.openxmlformats.org/presentationml/2006/main" xmlns:r="http://schemas.openxmlformats.org/officeDocument/2006/relationships">
+  <p:cSld>
+    <p:spTree>
+      <p:nvGrpSpPr>
+        <p:cNvPr id="1" name=""/>
+        <p:cNvGrpSpPr/>
+        <p:nvPr/>
+      </p:nvGrpSpPr>
+      <p:grpSpPr>
+        <a:xfrm>
+          <a:off x="0" y="0"/>
+          <a:ext cx="0" cy="0"/>
+          <a:chOff x="0" y="0"/>
+          <a:chExt cx="0" cy="0"/>
+        </a:xfrm>
+      </p:grpSpPr>
+      <p:sp>
+        <p:nvSpPr>
+          <p:cNvPr id="2" name="Slide Image Placeholder 1"/>
+          <p:cNvSpPr>
+            <a:spLocks noGrp="1"/>
+          </p:cNvSpPr>
+          <p:nvPr>
+            <p:ph type="sldImg" idx="2"/>
+          </p:nvPr>
+        </p:nvSpPr>
+        <p:spPr/>
+      </p:sp>
+      <p:sp>
+        <p:nvSpPr>
+          <p:cNvPr id="3" name="Notes Placeholder 2"/>
+          <p:cNvSpPr>
+            <a:spLocks noGrp="1"/>
+          </p:cNvSpPr>
+          <p:nvPr>
+            <p:ph type="body" idx="3" sz="quarter"/>
+          </p:nvPr>
+        </p:nvSpPr>
+        <p:spPr/>
+        <p:txBody>
+          <a:bodyPr/>
+          <a:lstStyle/>
+          <a:p>
+            <a:r>
+              <a:t>◎ 다음 차시 예고</a:t>
+            </a:r>
+          </a:p>
+          <a:p>
+            <a:r>
+              <a:t>- 다음 시간에는 AI의 답에 숨은 치우침을 찾아봅시다.</a:t>
+            </a:r>
+          </a:p>
+          <a:p/>
+          <a:p>
+            <a:r>
+              <a:t>준비물</a:t>
+            </a:r>
+          </a:p>
+          <a:p>
+            <a:r>
+              <a:t>★ 배움 공책</a:t>
+            </a:r>
+          </a:p>
+          <a:p>
+            <a:r>
+              <a:t>△ 검증 3단계를 교실 게시물로 남기기</a:t>
+            </a:r>
+          </a:p>
+        </p:txBody>
+      </p:sp>
+      <p:sp>
+        <p:nvSpPr>
+          <p:cNvPr id="4" name="Slide Number Placeholder 3"/>
+          <p:cNvSpPr>
+            <a:spLocks noGrp="1"/>
+          </p:cNvSpPr>
+          <p:nvPr>
+            <p:ph type="sldNum" idx="5" sz="quarter"/>
+          </p:nvPr>
+        </p:nvSpPr>
+        <p:spPr/>
+      </p:sp>
+    </p:spTree>
+  </p:cSld>
+  <p:clrMapOvr>
+    <a:masterClrMapping/>
+  </p:clrMapOvr>
+</p:notes>
+</file>
+
+<file path=ppt/notesSlides/notesSlide16.xml><?xml version="1.0" encoding="utf-8"?>
+<p:notes xmlns:a="http://schemas.openxmlformats.org/drawingml/2006/main" xmlns:p="http://schemas.openxmlformats.org/presentationml/2006/main" xmlns:r="http://schemas.openxmlformats.org/officeDocument/2006/relationships">
+  <p:cSld>
+    <p:spTree>
+      <p:nvGrpSpPr>
+        <p:cNvPr id="1" name=""/>
+        <p:cNvGrpSpPr/>
+        <p:nvPr/>
+      </p:nvGrpSpPr>
+      <p:grpSpPr>
+        <a:xfrm>
+          <a:off x="0" y="0"/>
+          <a:ext cx="0" cy="0"/>
+          <a:chOff x="0" y="0"/>
+          <a:chExt cx="0" cy="0"/>
+        </a:xfrm>
+      </p:grpSpPr>
+      <p:sp>
+        <p:nvSpPr>
+          <p:cNvPr id="2" name="Slide Image Placeholder 1"/>
+          <p:cNvSpPr>
+            <a:spLocks noGrp="1"/>
+          </p:cNvSpPr>
+          <p:nvPr>
+            <p:ph type="sldImg" idx="2"/>
+          </p:nvPr>
+        </p:nvSpPr>
+        <p:spPr/>
+      </p:sp>
+      <p:sp>
+        <p:nvSpPr>
+          <p:cNvPr id="3" name="Notes Placeholder 2"/>
+          <p:cNvSpPr>
+            <a:spLocks noGrp="1"/>
+          </p:cNvSpPr>
+          <p:nvPr>
+            <p:ph type="body" idx="3" sz="quarter"/>
+          </p:nvPr>
+        </p:nvSpPr>
+        <p:spPr/>
+        <p:txBody>
+          <a:bodyPr/>
+          <a:lstStyle/>
+          <a:p>
+            <a:r>
               <a:t>오늘 배운 것을 학생이 한 문장으로 말하게 한다.</a:t>
             </a:r>
           </a:p>
@@ -1302,7 +1751,7 @@
           </a:p>
           <a:p>
             <a:r>
-              <a:t>교사 화면 : 학급이 찾은 환각 사례를 한눈에 모아 보기</a:t>
+              <a:t>교사 화면 : 문항별 판정 분포, 학급 정답률, 학생이 만든 환각 사례 카드 모음, 배움 문장</a:t>
             </a:r>
           </a:p>
         </p:txBody>
@@ -1372,22 +1821,23 @@
           <a:lstStyle/>
           <a:p>
             <a:r>
-              <a:t>1인 1기기가 아니어도 모두 참여하게 한다.</a:t>
-            </a:r>
-          </a:p>
-          <a:p>
-            <a:r>
-              <a:t>사실 확인이 가능한 질문으로만 한정한다.</a:t>
-            </a:r>
-          </a:p>
-          <a:p>
-            <a:r>
-              <a:t>개인 이름을 넣어 검색하지 않는다.</a:t>
-            </a:r>
-          </a:p>
-          <a:p>
-            <a:r>
-              <a:t>특정 서비스 비방으로 흐르지 않게 한다.</a:t>
+              <a:t>1단계 · 5분</a:t>
+            </a:r>
+          </a:p>
+          <a:p>
+            <a:r>
+              <a:t>그럴듯하게 쓰인 답 하나를 먼저 보여 주고 믿을지 말지 투표한다. 확인하기 전에는 사람도 속는다는 것을 겪는다.</a:t>
+            </a:r>
+          </a:p>
+          <a:p/>
+          <a:p>
+            <a:r>
+              <a:t>발문 : 이 답을 믿어도 될까요? 무엇을 보고 그렇게 생각했나요?</a:t>
+            </a:r>
+          </a:p>
+          <a:p>
+            <a:r>
+              <a:t>예상 답변 : 말투가 자신 있어서 맞는 것 같습니다.</a:t>
             </a:r>
           </a:p>
         </p:txBody>
@@ -1457,33 +1907,23 @@
           <a:lstStyle/>
           <a:p>
             <a:r>
-              <a:t>◎ 배움 정리</a:t>
-            </a:r>
-          </a:p>
-          <a:p>
-            <a:r>
-              <a:t>- AI의 답을 받았을 때 가장 먼저 할 일은 무엇인가요?</a:t>
-            </a:r>
-          </a:p>
-          <a:p>
-            <a:r>
-              <a:t>  · 어디서 나온 이야기인지 출처를 확인하는 일입니다.</a:t>
+              <a:t>2단계 · 11분</a:t>
+            </a:r>
+          </a:p>
+          <a:p>
+            <a:r>
+              <a:t>질문 다섯 개에 두 도구가 내놓은 답이 나란히 뜬다. 서로 다른 곳을 눌러 표시하고 어느 쪽이 의심스러운지 고른다.</a:t>
             </a:r>
           </a:p>
           <a:p/>
           <a:p>
             <a:r>
-              <a:t>준비물</a:t>
-            </a:r>
-          </a:p>
-          <a:p>
-            <a:r>
-              <a:t>★ 배움 공책</a:t>
-            </a:r>
-          </a:p>
-          <a:p>
-            <a:r>
-              <a:t>△ 검증 3단계를 교실 게시물로 남기기</a:t>
+              <a:t>발문 : 답이 다르다는 것은 무엇을 뜻할까요?</a:t>
+            </a:r>
+          </a:p>
+          <a:p>
+            <a:r>
+              <a:t>예상 답변 : 둘 중 하나는 틀렸다는 뜻이고, 확인이 필요하다는 뜻입니다.</a:t>
             </a:r>
           </a:p>
         </p:txBody>
@@ -4753,14 +5193,97 @@
       </p:sp>
       <p:sp>
         <p:nvSpPr>
-          <p:cNvPr id="3" name="TextBox 2"/>
+          <p:cNvPr id="3" name="Rectangle 2"/>
+          <p:cNvSpPr/>
+          <p:nvPr/>
+        </p:nvSpPr>
+        <p:spPr>
+          <a:xfrm>
+            <a:off x="10088575" y="640080"/>
+            <a:ext cx="1280160" cy="502920"/>
+          </a:xfrm>
+          <a:prstGeom prst="rect">
+            <a:avLst/>
+          </a:prstGeom>
+          <a:solidFill>
+            <a:srgbClr val="2563EB"/>
+          </a:solidFill>
+          <a:ln>
+            <a:noFill/>
+          </a:ln>
+          <a:effectLst/>
+        </p:spPr>
+        <p:style>
+          <a:lnRef idx="1">
+            <a:schemeClr val="accent1"/>
+          </a:lnRef>
+          <a:fillRef idx="3">
+            <a:schemeClr val="accent1"/>
+          </a:fillRef>
+          <a:effectRef idx="2">
+            <a:schemeClr val="accent1"/>
+          </a:effectRef>
+          <a:fontRef idx="minor">
+            <a:schemeClr val="lt1"/>
+          </a:fontRef>
+        </p:style>
+        <p:txBody>
+          <a:bodyPr rtlCol="0" anchor="ctr"/>
+          <a:lstStyle/>
+          <a:p>
+            <a:pPr algn="ctr"/>
+          </a:p>
+        </p:txBody>
+      </p:sp>
+      <p:sp>
+        <p:nvSpPr>
+          <p:cNvPr id="4" name="TextBox 3"/>
           <p:cNvSpPr txBox="1"/>
           <p:nvPr/>
         </p:nvSpPr>
         <p:spPr>
           <a:xfrm>
+            <a:off x="10088575" y="658368"/>
+            <a:ext cx="1280160" cy="457200"/>
+          </a:xfrm>
+          <a:prstGeom prst="rect">
+            <a:avLst/>
+          </a:prstGeom>
+          <a:noFill/>
+        </p:spPr>
+        <p:txBody>
+          <a:bodyPr wrap="square" anchor="t">
+            <a:spAutoFit/>
+          </a:bodyPr>
+          <a:lstStyle/>
+          <a:p>
+            <a:pPr algn="ctr">
+              <a:lnSpc>
+                <a:spcPct val="125000"/>
+              </a:lnSpc>
+            </a:pPr>
+            <a:r>
+              <a:rPr sz="2000" b="1">
+                <a:solidFill>
+                  <a:srgbClr val="FFFFFF"/>
+                </a:solidFill>
+                <a:latin typeface="맑은 고딕"/>
+              </a:rPr>
+              <a:t>12분</a:t>
+            </a:r>
+          </a:p>
+        </p:txBody>
+      </p:sp>
+      <p:sp>
+        <p:nvSpPr>
+          <p:cNvPr id="5" name="TextBox 4"/>
+          <p:cNvSpPr txBox="1"/>
+          <p:nvPr/>
+        </p:nvSpPr>
+        <p:spPr>
+          <a:xfrm>
             <a:off x="822960" y="731520"/>
-            <a:ext cx="10545775" cy="548640"/>
+            <a:ext cx="8351215" cy="457200"/>
           </a:xfrm>
           <a:prstGeom prst="rect">
             <a:avLst/>
@@ -4779,27 +5302,27 @@
               </a:lnSpc>
             </a:pPr>
             <a:r>
-              <a:rPr sz="2000" b="1">
+              <a:rPr sz="1800" b="1">
                 <a:solidFill>
                   <a:srgbClr val="2563EB"/>
                 </a:solidFill>
                 <a:latin typeface="맑은 고딕"/>
               </a:rPr>
-              <a:t>정리 · 다음 차시 예고</a:t>
-            </a:r>
-          </a:p>
-        </p:txBody>
-      </p:sp>
-      <p:sp>
-        <p:nvSpPr>
-          <p:cNvPr id="4" name="TextBox 3"/>
+              <a:t>3단계</a:t>
+            </a:r>
+          </a:p>
+        </p:txBody>
+      </p:sp>
+      <p:sp>
+        <p:nvSpPr>
+          <p:cNvPr id="6" name="TextBox 5"/>
           <p:cNvSpPr txBox="1"/>
           <p:nvPr/>
         </p:nvSpPr>
         <p:spPr>
           <a:xfrm>
-            <a:off x="822960" y="1828800"/>
-            <a:ext cx="10545775" cy="3291840"/>
+            <a:off x="822960" y="1371600"/>
+            <a:ext cx="10545775" cy="822960"/>
           </a:xfrm>
           <a:prstGeom prst="rect">
             <a:avLst/>
@@ -4814,17 +5337,95 @@
           <a:p>
             <a:pPr algn="l">
               <a:lnSpc>
-                <a:spcPct val="160000"/>
+                <a:spcPct val="125000"/>
               </a:lnSpc>
             </a:pPr>
             <a:r>
-              <a:rPr sz="2800" b="0">
+              <a:rPr sz="3600" b="1">
                 <a:solidFill>
                   <a:srgbClr val="1F2937"/>
                 </a:solidFill>
                 <a:latin typeface="맑은 고딕"/>
               </a:rPr>
-              <a:t>다음 시간에는 AI의 답에 숨은 치우침을 찾아봅시다.</a:t>
+              <a:t>근거 자료와 대조하기</a:t>
+            </a:r>
+          </a:p>
+        </p:txBody>
+      </p:sp>
+      <p:sp>
+        <p:nvSpPr>
+          <p:cNvPr id="7" name="TextBox 6"/>
+          <p:cNvSpPr txBox="1"/>
+          <p:nvPr/>
+        </p:nvSpPr>
+        <p:spPr>
+          <a:xfrm>
+            <a:off x="822960" y="2468880"/>
+            <a:ext cx="10545775" cy="1463040"/>
+          </a:xfrm>
+          <a:prstGeom prst="rect">
+            <a:avLst/>
+          </a:prstGeom>
+          <a:noFill/>
+        </p:spPr>
+        <p:txBody>
+          <a:bodyPr wrap="square" anchor="t">
+            <a:spAutoFit/>
+          </a:bodyPr>
+          <a:lstStyle/>
+          <a:p>
+            <a:pPr algn="l">
+              <a:lnSpc>
+                <a:spcPct val="150000"/>
+              </a:lnSpc>
+            </a:pPr>
+            <a:r>
+              <a:rPr sz="2000" b="0">
+                <a:solidFill>
+                  <a:srgbClr val="6B7280"/>
+                </a:solidFill>
+                <a:latin typeface="맑은 고딕"/>
+              </a:rPr>
+              <a:t>교과서와 공공 누리집에서 가져온 근거 자료가 앱 안에 들어 있다. 출처 확인, 자료 대조, 내 말로 정리의 3단계를 밟아 판정한다.</a:t>
+            </a:r>
+          </a:p>
+        </p:txBody>
+      </p:sp>
+      <p:sp>
+        <p:nvSpPr>
+          <p:cNvPr id="8" name="TextBox 7"/>
+          <p:cNvSpPr txBox="1"/>
+          <p:nvPr/>
+        </p:nvSpPr>
+        <p:spPr>
+          <a:xfrm>
+            <a:off x="822960" y="4114800"/>
+            <a:ext cx="10545775" cy="1097280"/>
+          </a:xfrm>
+          <a:prstGeom prst="rect">
+            <a:avLst/>
+          </a:prstGeom>
+          <a:noFill/>
+        </p:spPr>
+        <p:txBody>
+          <a:bodyPr wrap="square" anchor="t">
+            <a:spAutoFit/>
+          </a:bodyPr>
+          <a:lstStyle/>
+          <a:p>
+            <a:pPr algn="l">
+              <a:lnSpc>
+                <a:spcPct val="125000"/>
+              </a:lnSpc>
+            </a:pPr>
+            <a:r>
+              <a:rPr sz="2600" b="1">
+                <a:solidFill>
+                  <a:srgbClr val="1F2937"/>
+                </a:solidFill>
+                <a:latin typeface="맑은 고딕"/>
+              </a:rPr>
+              <a:t>확인해 보니 무엇이 달라졌나요?</a:t>
             </a:r>
           </a:p>
         </p:txBody>
@@ -4893,6 +5494,1028 @@
       </p:sp>
       <p:sp>
         <p:nvSpPr>
+          <p:cNvPr id="3" name="Rectangle 2"/>
+          <p:cNvSpPr/>
+          <p:nvPr/>
+        </p:nvSpPr>
+        <p:spPr>
+          <a:xfrm>
+            <a:off x="10088575" y="640080"/>
+            <a:ext cx="1280160" cy="502920"/>
+          </a:xfrm>
+          <a:prstGeom prst="rect">
+            <a:avLst/>
+          </a:prstGeom>
+          <a:solidFill>
+            <a:srgbClr val="2563EB"/>
+          </a:solidFill>
+          <a:ln>
+            <a:noFill/>
+          </a:ln>
+          <a:effectLst/>
+        </p:spPr>
+        <p:style>
+          <a:lnRef idx="1">
+            <a:schemeClr val="accent1"/>
+          </a:lnRef>
+          <a:fillRef idx="3">
+            <a:schemeClr val="accent1"/>
+          </a:fillRef>
+          <a:effectRef idx="2">
+            <a:schemeClr val="accent1"/>
+          </a:effectRef>
+          <a:fontRef idx="minor">
+            <a:schemeClr val="lt1"/>
+          </a:fontRef>
+        </p:style>
+        <p:txBody>
+          <a:bodyPr rtlCol="0" anchor="ctr"/>
+          <a:lstStyle/>
+          <a:p>
+            <a:pPr algn="ctr"/>
+          </a:p>
+        </p:txBody>
+      </p:sp>
+      <p:sp>
+        <p:nvSpPr>
+          <p:cNvPr id="4" name="TextBox 3"/>
+          <p:cNvSpPr txBox="1"/>
+          <p:nvPr/>
+        </p:nvSpPr>
+        <p:spPr>
+          <a:xfrm>
+            <a:off x="10088575" y="658368"/>
+            <a:ext cx="1280160" cy="457200"/>
+          </a:xfrm>
+          <a:prstGeom prst="rect">
+            <a:avLst/>
+          </a:prstGeom>
+          <a:noFill/>
+        </p:spPr>
+        <p:txBody>
+          <a:bodyPr wrap="square" anchor="t">
+            <a:spAutoFit/>
+          </a:bodyPr>
+          <a:lstStyle/>
+          <a:p>
+            <a:pPr algn="ctr">
+              <a:lnSpc>
+                <a:spcPct val="125000"/>
+              </a:lnSpc>
+            </a:pPr>
+            <a:r>
+              <a:rPr sz="2000" b="1">
+                <a:solidFill>
+                  <a:srgbClr val="FFFFFF"/>
+                </a:solidFill>
+                <a:latin typeface="맑은 고딕"/>
+              </a:rPr>
+              <a:t>7분</a:t>
+            </a:r>
+          </a:p>
+        </p:txBody>
+      </p:sp>
+      <p:sp>
+        <p:nvSpPr>
+          <p:cNvPr id="5" name="TextBox 4"/>
+          <p:cNvSpPr txBox="1"/>
+          <p:nvPr/>
+        </p:nvSpPr>
+        <p:spPr>
+          <a:xfrm>
+            <a:off x="822960" y="731520"/>
+            <a:ext cx="8351215" cy="457200"/>
+          </a:xfrm>
+          <a:prstGeom prst="rect">
+            <a:avLst/>
+          </a:prstGeom>
+          <a:noFill/>
+        </p:spPr>
+        <p:txBody>
+          <a:bodyPr wrap="square" anchor="t">
+            <a:spAutoFit/>
+          </a:bodyPr>
+          <a:lstStyle/>
+          <a:p>
+            <a:pPr algn="l">
+              <a:lnSpc>
+                <a:spcPct val="125000"/>
+              </a:lnSpc>
+            </a:pPr>
+            <a:r>
+              <a:rPr sz="1800" b="1">
+                <a:solidFill>
+                  <a:srgbClr val="2563EB"/>
+                </a:solidFill>
+                <a:latin typeface="맑은 고딕"/>
+              </a:rPr>
+              <a:t>4단계</a:t>
+            </a:r>
+          </a:p>
+        </p:txBody>
+      </p:sp>
+      <p:sp>
+        <p:nvSpPr>
+          <p:cNvPr id="6" name="TextBox 5"/>
+          <p:cNvSpPr txBox="1"/>
+          <p:nvPr/>
+        </p:nvSpPr>
+        <p:spPr>
+          <a:xfrm>
+            <a:off x="822960" y="1371600"/>
+            <a:ext cx="10545775" cy="822960"/>
+          </a:xfrm>
+          <a:prstGeom prst="rect">
+            <a:avLst/>
+          </a:prstGeom>
+          <a:noFill/>
+        </p:spPr>
+        <p:txBody>
+          <a:bodyPr wrap="square" anchor="t">
+            <a:spAutoFit/>
+          </a:bodyPr>
+          <a:lstStyle/>
+          <a:p>
+            <a:pPr algn="l">
+              <a:lnSpc>
+                <a:spcPct val="125000"/>
+              </a:lnSpc>
+            </a:pPr>
+            <a:r>
+              <a:rPr sz="3600" b="1">
+                <a:solidFill>
+                  <a:srgbClr val="1F2937"/>
+                </a:solidFill>
+                <a:latin typeface="맑은 고딕"/>
+              </a:rPr>
+              <a:t>환각 사례 카드 만들기</a:t>
+            </a:r>
+          </a:p>
+        </p:txBody>
+      </p:sp>
+      <p:sp>
+        <p:nvSpPr>
+          <p:cNvPr id="7" name="TextBox 6"/>
+          <p:cNvSpPr txBox="1"/>
+          <p:nvPr/>
+        </p:nvSpPr>
+        <p:spPr>
+          <a:xfrm>
+            <a:off x="822960" y="2468880"/>
+            <a:ext cx="10545775" cy="1463040"/>
+          </a:xfrm>
+          <a:prstGeom prst="rect">
+            <a:avLst/>
+          </a:prstGeom>
+          <a:noFill/>
+        </p:spPr>
+        <p:txBody>
+          <a:bodyPr wrap="square" anchor="t">
+            <a:spAutoFit/>
+          </a:bodyPr>
+          <a:lstStyle/>
+          <a:p>
+            <a:pPr algn="l">
+              <a:lnSpc>
+                <a:spcPct val="150000"/>
+              </a:lnSpc>
+            </a:pPr>
+            <a:r>
+              <a:rPr sz="2000" b="0">
+                <a:solidFill>
+                  <a:srgbClr val="6B7280"/>
+                </a:solidFill>
+                <a:latin typeface="맑은 고딕"/>
+              </a:rPr>
+              <a:t>찾아낸 환각을 카드 두 장에 적는다. 무엇이 틀렸는지와 어떻게 확인했는지를 함께 쓴다.</a:t>
+            </a:r>
+          </a:p>
+        </p:txBody>
+      </p:sp>
+      <p:sp>
+        <p:nvSpPr>
+          <p:cNvPr id="8" name="TextBox 7"/>
+          <p:cNvSpPr txBox="1"/>
+          <p:nvPr/>
+        </p:nvSpPr>
+        <p:spPr>
+          <a:xfrm>
+            <a:off x="822960" y="4114800"/>
+            <a:ext cx="10545775" cy="1097280"/>
+          </a:xfrm>
+          <a:prstGeom prst="rect">
+            <a:avLst/>
+          </a:prstGeom>
+          <a:noFill/>
+        </p:spPr>
+        <p:txBody>
+          <a:bodyPr wrap="square" anchor="t">
+            <a:spAutoFit/>
+          </a:bodyPr>
+          <a:lstStyle/>
+          <a:p>
+            <a:pPr algn="l">
+              <a:lnSpc>
+                <a:spcPct val="125000"/>
+              </a:lnSpc>
+            </a:pPr>
+            <a:r>
+              <a:rPr sz="2600" b="1">
+                <a:solidFill>
+                  <a:srgbClr val="1F2937"/>
+                </a:solidFill>
+                <a:latin typeface="맑은 고딕"/>
+              </a:rPr>
+              <a:t>이 답이 틀렸다는 것을 어떻게 알아냈나요?</a:t>
+            </a:r>
+          </a:p>
+        </p:txBody>
+      </p:sp>
+    </p:spTree>
+  </p:cSld>
+  <p:clrMapOvr>
+    <a:masterClrMapping/>
+  </p:clrMapOvr>
+</p:sld>
+</file>
+
+<file path=ppt/slides/slide12.xml><?xml version="1.0" encoding="utf-8"?>
+<p:sld xmlns:a="http://schemas.openxmlformats.org/drawingml/2006/main" xmlns:p="http://schemas.openxmlformats.org/presentationml/2006/main" xmlns:r="http://schemas.openxmlformats.org/officeDocument/2006/relationships">
+  <p:cSld>
+    <p:spTree>
+      <p:nvGrpSpPr>
+        <p:cNvPr id="1" name=""/>
+        <p:cNvGrpSpPr/>
+        <p:nvPr/>
+      </p:nvGrpSpPr>
+      <p:grpSpPr/>
+      <p:sp>
+        <p:nvSpPr>
+          <p:cNvPr id="2" name="Rectangle 1"/>
+          <p:cNvSpPr/>
+          <p:nvPr/>
+        </p:nvSpPr>
+        <p:spPr>
+          <a:xfrm>
+            <a:off x="0" y="0"/>
+            <a:ext cx="201168" cy="6858000"/>
+          </a:xfrm>
+          <a:prstGeom prst="rect">
+            <a:avLst/>
+          </a:prstGeom>
+          <a:solidFill>
+            <a:srgbClr val="2563EB"/>
+          </a:solidFill>
+          <a:ln>
+            <a:noFill/>
+          </a:ln>
+          <a:effectLst/>
+        </p:spPr>
+        <p:style>
+          <a:lnRef idx="1">
+            <a:schemeClr val="accent1"/>
+          </a:lnRef>
+          <a:fillRef idx="3">
+            <a:schemeClr val="accent1"/>
+          </a:fillRef>
+          <a:effectRef idx="2">
+            <a:schemeClr val="accent1"/>
+          </a:effectRef>
+          <a:fontRef idx="minor">
+            <a:schemeClr val="lt1"/>
+          </a:fontRef>
+        </p:style>
+        <p:txBody>
+          <a:bodyPr rtlCol="0" anchor="ctr"/>
+          <a:lstStyle/>
+          <a:p>
+            <a:pPr algn="ctr"/>
+          </a:p>
+        </p:txBody>
+      </p:sp>
+      <p:sp>
+        <p:nvSpPr>
+          <p:cNvPr id="3" name="Rectangle 2"/>
+          <p:cNvSpPr/>
+          <p:nvPr/>
+        </p:nvSpPr>
+        <p:spPr>
+          <a:xfrm>
+            <a:off x="10088575" y="640080"/>
+            <a:ext cx="1280160" cy="502920"/>
+          </a:xfrm>
+          <a:prstGeom prst="rect">
+            <a:avLst/>
+          </a:prstGeom>
+          <a:solidFill>
+            <a:srgbClr val="2563EB"/>
+          </a:solidFill>
+          <a:ln>
+            <a:noFill/>
+          </a:ln>
+          <a:effectLst/>
+        </p:spPr>
+        <p:style>
+          <a:lnRef idx="1">
+            <a:schemeClr val="accent1"/>
+          </a:lnRef>
+          <a:fillRef idx="3">
+            <a:schemeClr val="accent1"/>
+          </a:fillRef>
+          <a:effectRef idx="2">
+            <a:schemeClr val="accent1"/>
+          </a:effectRef>
+          <a:fontRef idx="minor">
+            <a:schemeClr val="lt1"/>
+          </a:fontRef>
+        </p:style>
+        <p:txBody>
+          <a:bodyPr rtlCol="0" anchor="ctr"/>
+          <a:lstStyle/>
+          <a:p>
+            <a:pPr algn="ctr"/>
+          </a:p>
+        </p:txBody>
+      </p:sp>
+      <p:sp>
+        <p:nvSpPr>
+          <p:cNvPr id="4" name="TextBox 3"/>
+          <p:cNvSpPr txBox="1"/>
+          <p:nvPr/>
+        </p:nvSpPr>
+        <p:spPr>
+          <a:xfrm>
+            <a:off x="10088575" y="658368"/>
+            <a:ext cx="1280160" cy="457200"/>
+          </a:xfrm>
+          <a:prstGeom prst="rect">
+            <a:avLst/>
+          </a:prstGeom>
+          <a:noFill/>
+        </p:spPr>
+        <p:txBody>
+          <a:bodyPr wrap="square" anchor="t">
+            <a:spAutoFit/>
+          </a:bodyPr>
+          <a:lstStyle/>
+          <a:p>
+            <a:pPr algn="ctr">
+              <a:lnSpc>
+                <a:spcPct val="125000"/>
+              </a:lnSpc>
+            </a:pPr>
+            <a:r>
+              <a:rPr sz="2000" b="1">
+                <a:solidFill>
+                  <a:srgbClr val="FFFFFF"/>
+                </a:solidFill>
+                <a:latin typeface="맑은 고딕"/>
+              </a:rPr>
+              <a:t>5분</a:t>
+            </a:r>
+          </a:p>
+        </p:txBody>
+      </p:sp>
+      <p:sp>
+        <p:nvSpPr>
+          <p:cNvPr id="5" name="TextBox 4"/>
+          <p:cNvSpPr txBox="1"/>
+          <p:nvPr/>
+        </p:nvSpPr>
+        <p:spPr>
+          <a:xfrm>
+            <a:off x="822960" y="731520"/>
+            <a:ext cx="8351215" cy="457200"/>
+          </a:xfrm>
+          <a:prstGeom prst="rect">
+            <a:avLst/>
+          </a:prstGeom>
+          <a:noFill/>
+        </p:spPr>
+        <p:txBody>
+          <a:bodyPr wrap="square" anchor="t">
+            <a:spAutoFit/>
+          </a:bodyPr>
+          <a:lstStyle/>
+          <a:p>
+            <a:pPr algn="l">
+              <a:lnSpc>
+                <a:spcPct val="125000"/>
+              </a:lnSpc>
+            </a:pPr>
+            <a:r>
+              <a:rPr sz="1800" b="1">
+                <a:solidFill>
+                  <a:srgbClr val="2563EB"/>
+                </a:solidFill>
+                <a:latin typeface="맑은 고딕"/>
+              </a:rPr>
+              <a:t>5단계</a:t>
+            </a:r>
+          </a:p>
+        </p:txBody>
+      </p:sp>
+      <p:sp>
+        <p:nvSpPr>
+          <p:cNvPr id="6" name="TextBox 5"/>
+          <p:cNvSpPr txBox="1"/>
+          <p:nvPr/>
+        </p:nvSpPr>
+        <p:spPr>
+          <a:xfrm>
+            <a:off x="822960" y="1371600"/>
+            <a:ext cx="10545775" cy="822960"/>
+          </a:xfrm>
+          <a:prstGeom prst="rect">
+            <a:avLst/>
+          </a:prstGeom>
+          <a:noFill/>
+        </p:spPr>
+        <p:txBody>
+          <a:bodyPr wrap="square" anchor="t">
+            <a:spAutoFit/>
+          </a:bodyPr>
+          <a:lstStyle/>
+          <a:p>
+            <a:pPr algn="l">
+              <a:lnSpc>
+                <a:spcPct val="125000"/>
+              </a:lnSpc>
+            </a:pPr>
+            <a:r>
+              <a:rPr sz="3600" b="1">
+                <a:solidFill>
+                  <a:srgbClr val="1F2937"/>
+                </a:solidFill>
+                <a:latin typeface="맑은 고딕"/>
+              </a:rPr>
+              <a:t>판정 결과와 배움 정리</a:t>
+            </a:r>
+          </a:p>
+        </p:txBody>
+      </p:sp>
+      <p:sp>
+        <p:nvSpPr>
+          <p:cNvPr id="7" name="TextBox 6"/>
+          <p:cNvSpPr txBox="1"/>
+          <p:nvPr/>
+        </p:nvSpPr>
+        <p:spPr>
+          <a:xfrm>
+            <a:off x="822960" y="2468880"/>
+            <a:ext cx="10545775" cy="1463040"/>
+          </a:xfrm>
+          <a:prstGeom prst="rect">
+            <a:avLst/>
+          </a:prstGeom>
+          <a:noFill/>
+        </p:spPr>
+        <p:txBody>
+          <a:bodyPr wrap="square" anchor="t">
+            <a:spAutoFit/>
+          </a:bodyPr>
+          <a:lstStyle/>
+          <a:p>
+            <a:pPr algn="l">
+              <a:lnSpc>
+                <a:spcPct val="150000"/>
+              </a:lnSpc>
+            </a:pPr>
+            <a:r>
+              <a:rPr sz="2000" b="0">
+                <a:solidFill>
+                  <a:srgbClr val="6B7280"/>
+                </a:solidFill>
+                <a:latin typeface="맑은 고딕"/>
+              </a:rPr>
+              <a:t>내 판정과 실제 판정을 맞춰 보고 학급 집계를 함께 본다. 배운 것을 한 문장으로 남긴다.</a:t>
+            </a:r>
+          </a:p>
+        </p:txBody>
+      </p:sp>
+      <p:sp>
+        <p:nvSpPr>
+          <p:cNvPr id="8" name="TextBox 7"/>
+          <p:cNvSpPr txBox="1"/>
+          <p:nvPr/>
+        </p:nvSpPr>
+        <p:spPr>
+          <a:xfrm>
+            <a:off x="822960" y="4114800"/>
+            <a:ext cx="10545775" cy="1097280"/>
+          </a:xfrm>
+          <a:prstGeom prst="rect">
+            <a:avLst/>
+          </a:prstGeom>
+          <a:noFill/>
+        </p:spPr>
+        <p:txBody>
+          <a:bodyPr wrap="square" anchor="t">
+            <a:spAutoFit/>
+          </a:bodyPr>
+          <a:lstStyle/>
+          <a:p>
+            <a:pPr algn="l">
+              <a:lnSpc>
+                <a:spcPct val="125000"/>
+              </a:lnSpc>
+            </a:pPr>
+            <a:r>
+              <a:rPr sz="2600" b="1">
+                <a:solidFill>
+                  <a:srgbClr val="1F2937"/>
+                </a:solidFill>
+                <a:latin typeface="맑은 고딕"/>
+              </a:rPr>
+              <a:t>AI의 답을 받았을 때 가장 먼저 할 일은 무엇인가요?</a:t>
+            </a:r>
+          </a:p>
+        </p:txBody>
+      </p:sp>
+    </p:spTree>
+  </p:cSld>
+  <p:clrMapOvr>
+    <a:masterClrMapping/>
+  </p:clrMapOvr>
+</p:sld>
+</file>
+
+<file path=ppt/slides/slide13.xml><?xml version="1.0" encoding="utf-8"?>
+<p:sld xmlns:a="http://schemas.openxmlformats.org/drawingml/2006/main" xmlns:p="http://schemas.openxmlformats.org/presentationml/2006/main" xmlns:r="http://schemas.openxmlformats.org/officeDocument/2006/relationships">
+  <p:cSld>
+    <p:spTree>
+      <p:nvGrpSpPr>
+        <p:cNvPr id="1" name=""/>
+        <p:cNvGrpSpPr/>
+        <p:nvPr/>
+      </p:nvGrpSpPr>
+      <p:grpSpPr/>
+      <p:sp>
+        <p:nvSpPr>
+          <p:cNvPr id="2" name="Rectangle 1"/>
+          <p:cNvSpPr/>
+          <p:nvPr/>
+        </p:nvSpPr>
+        <p:spPr>
+          <a:xfrm>
+            <a:off x="0" y="2103120"/>
+            <a:ext cx="12191695" cy="2377440"/>
+          </a:xfrm>
+          <a:prstGeom prst="rect">
+            <a:avLst/>
+          </a:prstGeom>
+          <a:solidFill>
+            <a:srgbClr val="F3F4F6"/>
+          </a:solidFill>
+          <a:ln>
+            <a:noFill/>
+          </a:ln>
+          <a:effectLst/>
+        </p:spPr>
+        <p:style>
+          <a:lnRef idx="1">
+            <a:schemeClr val="accent1"/>
+          </a:lnRef>
+          <a:fillRef idx="3">
+            <a:schemeClr val="accent1"/>
+          </a:fillRef>
+          <a:effectRef idx="2">
+            <a:schemeClr val="accent1"/>
+          </a:effectRef>
+          <a:fontRef idx="minor">
+            <a:schemeClr val="lt1"/>
+          </a:fontRef>
+        </p:style>
+        <p:txBody>
+          <a:bodyPr rtlCol="0" anchor="ctr"/>
+          <a:lstStyle/>
+          <a:p>
+            <a:pPr algn="ctr"/>
+          </a:p>
+        </p:txBody>
+      </p:sp>
+      <p:sp>
+        <p:nvSpPr>
+          <p:cNvPr id="3" name="TextBox 2"/>
+          <p:cNvSpPr txBox="1"/>
+          <p:nvPr/>
+        </p:nvSpPr>
+        <p:spPr>
+          <a:xfrm>
+            <a:off x="822960" y="1280160"/>
+            <a:ext cx="10545775" cy="548640"/>
+          </a:xfrm>
+          <a:prstGeom prst="rect">
+            <a:avLst/>
+          </a:prstGeom>
+          <a:noFill/>
+        </p:spPr>
+        <p:txBody>
+          <a:bodyPr wrap="square" anchor="t">
+            <a:spAutoFit/>
+          </a:bodyPr>
+          <a:lstStyle/>
+          <a:p>
+            <a:pPr algn="l">
+              <a:lnSpc>
+                <a:spcPct val="125000"/>
+              </a:lnSpc>
+            </a:pPr>
+            <a:r>
+              <a:rPr sz="2000" b="1">
+                <a:solidFill>
+                  <a:srgbClr val="2563EB"/>
+                </a:solidFill>
+                <a:latin typeface="맑은 고딕"/>
+              </a:rPr>
+              <a:t>기기가 없어도 함께합니다</a:t>
+            </a:r>
+          </a:p>
+        </p:txBody>
+      </p:sp>
+      <p:sp>
+        <p:nvSpPr>
+          <p:cNvPr id="4" name="TextBox 3"/>
+          <p:cNvSpPr txBox="1"/>
+          <p:nvPr/>
+        </p:nvSpPr>
+        <p:spPr>
+          <a:xfrm>
+            <a:off x="822960" y="2560320"/>
+            <a:ext cx="10545775" cy="1645920"/>
+          </a:xfrm>
+          <a:prstGeom prst="rect">
+            <a:avLst/>
+          </a:prstGeom>
+          <a:noFill/>
+        </p:spPr>
+        <p:txBody>
+          <a:bodyPr wrap="square" anchor="t">
+            <a:spAutoFit/>
+          </a:bodyPr>
+          <a:lstStyle/>
+          <a:p>
+            <a:pPr algn="l">
+              <a:lnSpc>
+                <a:spcPct val="125000"/>
+              </a:lnSpc>
+            </a:pPr>
+            <a:r>
+              <a:rPr sz="2400" b="0">
+                <a:solidFill>
+                  <a:srgbClr val="1F2937"/>
+                </a:solidFill>
+                <a:latin typeface="맑은 고딕"/>
+              </a:rPr>
+              <a:t>기기가 부족하면 교사 화면 하나로 함께 진행한다. 두 답과 근거 자료를 인쇄해 모둠에 나눠 주고 같은 순서로 대조하면 된다.</a:t>
+            </a:r>
+          </a:p>
+        </p:txBody>
+      </p:sp>
+    </p:spTree>
+  </p:cSld>
+  <p:clrMapOvr>
+    <a:masterClrMapping/>
+  </p:clrMapOvr>
+</p:sld>
+</file>
+
+<file path=ppt/slides/slide14.xml><?xml version="1.0" encoding="utf-8"?>
+<p:sld xmlns:a="http://schemas.openxmlformats.org/drawingml/2006/main" xmlns:p="http://schemas.openxmlformats.org/presentationml/2006/main" xmlns:r="http://schemas.openxmlformats.org/officeDocument/2006/relationships">
+  <p:cSld>
+    <p:spTree>
+      <p:nvGrpSpPr>
+        <p:cNvPr id="1" name=""/>
+        <p:cNvGrpSpPr/>
+        <p:nvPr/>
+      </p:nvGrpSpPr>
+      <p:grpSpPr/>
+      <p:sp>
+        <p:nvSpPr>
+          <p:cNvPr id="2" name="Rectangle 1"/>
+          <p:cNvSpPr/>
+          <p:nvPr/>
+        </p:nvSpPr>
+        <p:spPr>
+          <a:xfrm>
+            <a:off x="0" y="0"/>
+            <a:ext cx="201168" cy="6858000"/>
+          </a:xfrm>
+          <a:prstGeom prst="rect">
+            <a:avLst/>
+          </a:prstGeom>
+          <a:solidFill>
+            <a:srgbClr val="2563EB"/>
+          </a:solidFill>
+          <a:ln>
+            <a:noFill/>
+          </a:ln>
+          <a:effectLst/>
+        </p:spPr>
+        <p:style>
+          <a:lnRef idx="1">
+            <a:schemeClr val="accent1"/>
+          </a:lnRef>
+          <a:fillRef idx="3">
+            <a:schemeClr val="accent1"/>
+          </a:fillRef>
+          <a:effectRef idx="2">
+            <a:schemeClr val="accent1"/>
+          </a:effectRef>
+          <a:fontRef idx="minor">
+            <a:schemeClr val="lt1"/>
+          </a:fontRef>
+        </p:style>
+        <p:txBody>
+          <a:bodyPr rtlCol="0" anchor="ctr"/>
+          <a:lstStyle/>
+          <a:p>
+            <a:pPr algn="ctr"/>
+          </a:p>
+        </p:txBody>
+      </p:sp>
+      <p:sp>
+        <p:nvSpPr>
+          <p:cNvPr id="3" name="TextBox 2"/>
+          <p:cNvSpPr txBox="1"/>
+          <p:nvPr/>
+        </p:nvSpPr>
+        <p:spPr>
+          <a:xfrm>
+            <a:off x="822960" y="731520"/>
+            <a:ext cx="10545775" cy="548640"/>
+          </a:xfrm>
+          <a:prstGeom prst="rect">
+            <a:avLst/>
+          </a:prstGeom>
+          <a:noFill/>
+        </p:spPr>
+        <p:txBody>
+          <a:bodyPr wrap="square" anchor="t">
+            <a:spAutoFit/>
+          </a:bodyPr>
+          <a:lstStyle/>
+          <a:p>
+            <a:pPr algn="l">
+              <a:lnSpc>
+                <a:spcPct val="125000"/>
+              </a:lnSpc>
+            </a:pPr>
+            <a:r>
+              <a:rPr sz="2000" b="1">
+                <a:solidFill>
+                  <a:srgbClr val="2563EB"/>
+                </a:solidFill>
+                <a:latin typeface="맑은 고딕"/>
+              </a:rPr>
+              <a:t>정리 · 배움 정리</a:t>
+            </a:r>
+          </a:p>
+        </p:txBody>
+      </p:sp>
+      <p:sp>
+        <p:nvSpPr>
+          <p:cNvPr id="4" name="TextBox 3"/>
+          <p:cNvSpPr txBox="1"/>
+          <p:nvPr/>
+        </p:nvSpPr>
+        <p:spPr>
+          <a:xfrm>
+            <a:off x="822960" y="1828800"/>
+            <a:ext cx="10545775" cy="3291840"/>
+          </a:xfrm>
+          <a:prstGeom prst="rect">
+            <a:avLst/>
+          </a:prstGeom>
+          <a:noFill/>
+        </p:spPr>
+        <p:txBody>
+          <a:bodyPr wrap="square" anchor="t">
+            <a:spAutoFit/>
+          </a:bodyPr>
+          <a:lstStyle/>
+          <a:p>
+            <a:pPr algn="l">
+              <a:lnSpc>
+                <a:spcPct val="160000"/>
+              </a:lnSpc>
+            </a:pPr>
+            <a:r>
+              <a:rPr sz="2800" b="0">
+                <a:solidFill>
+                  <a:srgbClr val="1F2937"/>
+                </a:solidFill>
+                <a:latin typeface="맑은 고딕"/>
+              </a:rPr>
+              <a:t>AI의 답을 받았을 때 가장 먼저 할 일은 무엇인가요?</a:t>
+            </a:r>
+          </a:p>
+        </p:txBody>
+      </p:sp>
+    </p:spTree>
+  </p:cSld>
+  <p:clrMapOvr>
+    <a:masterClrMapping/>
+  </p:clrMapOvr>
+</p:sld>
+</file>
+
+<file path=ppt/slides/slide15.xml><?xml version="1.0" encoding="utf-8"?>
+<p:sld xmlns:a="http://schemas.openxmlformats.org/drawingml/2006/main" xmlns:p="http://schemas.openxmlformats.org/presentationml/2006/main" xmlns:r="http://schemas.openxmlformats.org/officeDocument/2006/relationships">
+  <p:cSld>
+    <p:spTree>
+      <p:nvGrpSpPr>
+        <p:cNvPr id="1" name=""/>
+        <p:cNvGrpSpPr/>
+        <p:nvPr/>
+      </p:nvGrpSpPr>
+      <p:grpSpPr/>
+      <p:sp>
+        <p:nvSpPr>
+          <p:cNvPr id="2" name="Rectangle 1"/>
+          <p:cNvSpPr/>
+          <p:nvPr/>
+        </p:nvSpPr>
+        <p:spPr>
+          <a:xfrm>
+            <a:off x="0" y="0"/>
+            <a:ext cx="201168" cy="6858000"/>
+          </a:xfrm>
+          <a:prstGeom prst="rect">
+            <a:avLst/>
+          </a:prstGeom>
+          <a:solidFill>
+            <a:srgbClr val="2563EB"/>
+          </a:solidFill>
+          <a:ln>
+            <a:noFill/>
+          </a:ln>
+          <a:effectLst/>
+        </p:spPr>
+        <p:style>
+          <a:lnRef idx="1">
+            <a:schemeClr val="accent1"/>
+          </a:lnRef>
+          <a:fillRef idx="3">
+            <a:schemeClr val="accent1"/>
+          </a:fillRef>
+          <a:effectRef idx="2">
+            <a:schemeClr val="accent1"/>
+          </a:effectRef>
+          <a:fontRef idx="minor">
+            <a:schemeClr val="lt1"/>
+          </a:fontRef>
+        </p:style>
+        <p:txBody>
+          <a:bodyPr rtlCol="0" anchor="ctr"/>
+          <a:lstStyle/>
+          <a:p>
+            <a:pPr algn="ctr"/>
+          </a:p>
+        </p:txBody>
+      </p:sp>
+      <p:sp>
+        <p:nvSpPr>
+          <p:cNvPr id="3" name="TextBox 2"/>
+          <p:cNvSpPr txBox="1"/>
+          <p:nvPr/>
+        </p:nvSpPr>
+        <p:spPr>
+          <a:xfrm>
+            <a:off x="822960" y="731520"/>
+            <a:ext cx="10545775" cy="548640"/>
+          </a:xfrm>
+          <a:prstGeom prst="rect">
+            <a:avLst/>
+          </a:prstGeom>
+          <a:noFill/>
+        </p:spPr>
+        <p:txBody>
+          <a:bodyPr wrap="square" anchor="t">
+            <a:spAutoFit/>
+          </a:bodyPr>
+          <a:lstStyle/>
+          <a:p>
+            <a:pPr algn="l">
+              <a:lnSpc>
+                <a:spcPct val="125000"/>
+              </a:lnSpc>
+            </a:pPr>
+            <a:r>
+              <a:rPr sz="2000" b="1">
+                <a:solidFill>
+                  <a:srgbClr val="2563EB"/>
+                </a:solidFill>
+                <a:latin typeface="맑은 고딕"/>
+              </a:rPr>
+              <a:t>정리 · 다음 차시 예고</a:t>
+            </a:r>
+          </a:p>
+        </p:txBody>
+      </p:sp>
+      <p:sp>
+        <p:nvSpPr>
+          <p:cNvPr id="4" name="TextBox 3"/>
+          <p:cNvSpPr txBox="1"/>
+          <p:nvPr/>
+        </p:nvSpPr>
+        <p:spPr>
+          <a:xfrm>
+            <a:off x="822960" y="1828800"/>
+            <a:ext cx="10545775" cy="3291840"/>
+          </a:xfrm>
+          <a:prstGeom prst="rect">
+            <a:avLst/>
+          </a:prstGeom>
+          <a:noFill/>
+        </p:spPr>
+        <p:txBody>
+          <a:bodyPr wrap="square" anchor="t">
+            <a:spAutoFit/>
+          </a:bodyPr>
+          <a:lstStyle/>
+          <a:p>
+            <a:pPr algn="l">
+              <a:lnSpc>
+                <a:spcPct val="160000"/>
+              </a:lnSpc>
+            </a:pPr>
+            <a:r>
+              <a:rPr sz="2800" b="0">
+                <a:solidFill>
+                  <a:srgbClr val="1F2937"/>
+                </a:solidFill>
+                <a:latin typeface="맑은 고딕"/>
+              </a:rPr>
+              <a:t>다음 시간에는 AI의 답에 숨은 치우침을 찾아봅시다.</a:t>
+            </a:r>
+          </a:p>
+        </p:txBody>
+      </p:sp>
+    </p:spTree>
+  </p:cSld>
+  <p:clrMapOvr>
+    <a:masterClrMapping/>
+  </p:clrMapOvr>
+</p:sld>
+</file>
+
+<file path=ppt/slides/slide16.xml><?xml version="1.0" encoding="utf-8"?>
+<p:sld xmlns:a="http://schemas.openxmlformats.org/drawingml/2006/main" xmlns:p="http://schemas.openxmlformats.org/presentationml/2006/main" xmlns:r="http://schemas.openxmlformats.org/officeDocument/2006/relationships">
+  <p:cSld>
+    <p:spTree>
+      <p:nvGrpSpPr>
+        <p:cNvPr id="1" name=""/>
+        <p:cNvGrpSpPr/>
+        <p:nvPr/>
+      </p:nvGrpSpPr>
+      <p:grpSpPr/>
+      <p:sp>
+        <p:nvSpPr>
+          <p:cNvPr id="2" name="Rectangle 1"/>
+          <p:cNvSpPr/>
+          <p:nvPr/>
+        </p:nvSpPr>
+        <p:spPr>
+          <a:xfrm>
+            <a:off x="0" y="0"/>
+            <a:ext cx="201168" cy="6858000"/>
+          </a:xfrm>
+          <a:prstGeom prst="rect">
+            <a:avLst/>
+          </a:prstGeom>
+          <a:solidFill>
+            <a:srgbClr val="2563EB"/>
+          </a:solidFill>
+          <a:ln>
+            <a:noFill/>
+          </a:ln>
+          <a:effectLst/>
+        </p:spPr>
+        <p:style>
+          <a:lnRef idx="1">
+            <a:schemeClr val="accent1"/>
+          </a:lnRef>
+          <a:fillRef idx="3">
+            <a:schemeClr val="accent1"/>
+          </a:fillRef>
+          <a:effectRef idx="2">
+            <a:schemeClr val="accent1"/>
+          </a:effectRef>
+          <a:fontRef idx="minor">
+            <a:schemeClr val="lt1"/>
+          </a:fontRef>
+        </p:style>
+        <p:txBody>
+          <a:bodyPr rtlCol="0" anchor="ctr"/>
+          <a:lstStyle/>
+          <a:p>
+            <a:pPr algn="ctr"/>
+          </a:p>
+        </p:txBody>
+      </p:sp>
+      <p:sp>
+        <p:nvSpPr>
           <p:cNvPr id="3" name="TextBox 2"/>
           <p:cNvSpPr txBox="1"/>
           <p:nvPr/>
@@ -5946,7 +7569,7 @@
                 </a:solidFill>
                 <a:latin typeface="맑은 고딕"/>
               </a:rPr>
-              <a:t>같은 질문에 대한 두 도구의 답을 나란히 기록하고, 검증 3단계를 따라가며 환각 사례 카드를 만든다.</a:t>
+              <a:t>같은 질문에 두 도구가 내놓은 답을 나란히 놓고 다른 곳을 찾은 뒤, 앱 안에 든 근거 자료와 대조해 검증 3단계를 밟는다. 무엇이 환각이었는지 판정하고 사례 카드로 남긴다.</a:t>
             </a:r>
           </a:p>
         </p:txBody>
@@ -5985,7 +7608,7 @@
                 </a:solidFill>
                 <a:latin typeface="맑은 고딕"/>
               </a:rPr>
-              <a:t>· 질문·답 나란히 기록</a:t>
+              <a:t>· 1단계 나는 이 답을 믿을까</a:t>
             </a:r>
           </a:p>
           <a:p>
@@ -6001,7 +7624,7 @@
                 </a:solidFill>
                 <a:latin typeface="맑은 고딕"/>
               </a:rPr>
-              <a:t>· 검증 3단계 체크</a:t>
+              <a:t>· 2단계 같은 질문, 다른 답</a:t>
             </a:r>
           </a:p>
           <a:p>
@@ -6017,7 +7640,7 @@
                 </a:solidFill>
                 <a:latin typeface="맑은 고딕"/>
               </a:rPr>
-              <a:t>· 환각 사례 카드 작성</a:t>
+              <a:t>· 3단계 근거 자료와 대조하기</a:t>
             </a:r>
           </a:p>
           <a:p>
@@ -6033,7 +7656,23 @@
                 </a:solidFill>
                 <a:latin typeface="맑은 고딕"/>
               </a:rPr>
-              <a:t>· 학급 사례 모음</a:t>
+              <a:t>· 4단계 환각 사례 카드 만들기</a:t>
+            </a:r>
+          </a:p>
+          <a:p>
+            <a:pPr algn="l">
+              <a:lnSpc>
+                <a:spcPct val="150000"/>
+              </a:lnSpc>
+            </a:pPr>
+            <a:r>
+              <a:rPr sz="2000" b="0">
+                <a:solidFill>
+                  <a:srgbClr val="1F2937"/>
+                </a:solidFill>
+                <a:latin typeface="맑은 고딕"/>
+              </a:rPr>
+              <a:t>· 5단계 판정 결과와 배움 정리</a:t>
             </a:r>
           </a:p>
         </p:txBody>
@@ -6064,14 +7703,14 @@
         </p:nvSpPr>
         <p:spPr>
           <a:xfrm>
-            <a:off x="0" y="2103120"/>
-            <a:ext cx="12191695" cy="2377440"/>
+            <a:off x="0" y="0"/>
+            <a:ext cx="201168" cy="6858000"/>
           </a:xfrm>
           <a:prstGeom prst="rect">
             <a:avLst/>
           </a:prstGeom>
           <a:solidFill>
-            <a:srgbClr val="F3F4F6"/>
+            <a:srgbClr val="2563EB"/>
           </a:solidFill>
           <a:ln>
             <a:noFill/>
@@ -6102,14 +7741,97 @@
       </p:sp>
       <p:sp>
         <p:nvSpPr>
-          <p:cNvPr id="3" name="TextBox 2"/>
+          <p:cNvPr id="3" name="Rectangle 2"/>
+          <p:cNvSpPr/>
+          <p:nvPr/>
+        </p:nvSpPr>
+        <p:spPr>
+          <a:xfrm>
+            <a:off x="10088575" y="640080"/>
+            <a:ext cx="1280160" cy="502920"/>
+          </a:xfrm>
+          <a:prstGeom prst="rect">
+            <a:avLst/>
+          </a:prstGeom>
+          <a:solidFill>
+            <a:srgbClr val="2563EB"/>
+          </a:solidFill>
+          <a:ln>
+            <a:noFill/>
+          </a:ln>
+          <a:effectLst/>
+        </p:spPr>
+        <p:style>
+          <a:lnRef idx="1">
+            <a:schemeClr val="accent1"/>
+          </a:lnRef>
+          <a:fillRef idx="3">
+            <a:schemeClr val="accent1"/>
+          </a:fillRef>
+          <a:effectRef idx="2">
+            <a:schemeClr val="accent1"/>
+          </a:effectRef>
+          <a:fontRef idx="minor">
+            <a:schemeClr val="lt1"/>
+          </a:fontRef>
+        </p:style>
+        <p:txBody>
+          <a:bodyPr rtlCol="0" anchor="ctr"/>
+          <a:lstStyle/>
+          <a:p>
+            <a:pPr algn="ctr"/>
+          </a:p>
+        </p:txBody>
+      </p:sp>
+      <p:sp>
+        <p:nvSpPr>
+          <p:cNvPr id="4" name="TextBox 3"/>
           <p:cNvSpPr txBox="1"/>
           <p:nvPr/>
         </p:nvSpPr>
         <p:spPr>
           <a:xfrm>
-            <a:off x="822960" y="1280160"/>
-            <a:ext cx="10545775" cy="548640"/>
+            <a:off x="10088575" y="658368"/>
+            <a:ext cx="1280160" cy="457200"/>
+          </a:xfrm>
+          <a:prstGeom prst="rect">
+            <a:avLst/>
+          </a:prstGeom>
+          <a:noFill/>
+        </p:spPr>
+        <p:txBody>
+          <a:bodyPr wrap="square" anchor="t">
+            <a:spAutoFit/>
+          </a:bodyPr>
+          <a:lstStyle/>
+          <a:p>
+            <a:pPr algn="ctr">
+              <a:lnSpc>
+                <a:spcPct val="125000"/>
+              </a:lnSpc>
+            </a:pPr>
+            <a:r>
+              <a:rPr sz="2000" b="1">
+                <a:solidFill>
+                  <a:srgbClr val="FFFFFF"/>
+                </a:solidFill>
+                <a:latin typeface="맑은 고딕"/>
+              </a:rPr>
+              <a:t>5분</a:t>
+            </a:r>
+          </a:p>
+        </p:txBody>
+      </p:sp>
+      <p:sp>
+        <p:nvSpPr>
+          <p:cNvPr id="5" name="TextBox 4"/>
+          <p:cNvSpPr txBox="1"/>
+          <p:nvPr/>
+        </p:nvSpPr>
+        <p:spPr>
+          <a:xfrm>
+            <a:off x="822960" y="731520"/>
+            <a:ext cx="8351215" cy="457200"/>
           </a:xfrm>
           <a:prstGeom prst="rect">
             <a:avLst/>
@@ -6128,27 +7850,27 @@
               </a:lnSpc>
             </a:pPr>
             <a:r>
-              <a:rPr sz="2000" b="1">
+              <a:rPr sz="1800" b="1">
                 <a:solidFill>
                   <a:srgbClr val="2563EB"/>
                 </a:solidFill>
                 <a:latin typeface="맑은 고딕"/>
               </a:rPr>
-              <a:t>기기가 없어도 함께합니다</a:t>
-            </a:r>
-          </a:p>
-        </p:txBody>
-      </p:sp>
-      <p:sp>
-        <p:nvSpPr>
-          <p:cNvPr id="4" name="TextBox 3"/>
+              <a:t>1단계</a:t>
+            </a:r>
+          </a:p>
+        </p:txBody>
+      </p:sp>
+      <p:sp>
+        <p:nvSpPr>
+          <p:cNvPr id="6" name="TextBox 5"/>
           <p:cNvSpPr txBox="1"/>
           <p:nvPr/>
         </p:nvSpPr>
         <p:spPr>
           <a:xfrm>
-            <a:off x="822960" y="2560320"/>
-            <a:ext cx="10545775" cy="1645920"/>
+            <a:off x="822960" y="1371600"/>
+            <a:ext cx="10545775" cy="822960"/>
           </a:xfrm>
           <a:prstGeom prst="rect">
             <a:avLst/>
@@ -6167,13 +7889,91 @@
               </a:lnSpc>
             </a:pPr>
             <a:r>
-              <a:rPr sz="2400" b="0">
+              <a:rPr sz="3600" b="1">
                 <a:solidFill>
                   <a:srgbClr val="1F2937"/>
                 </a:solidFill>
                 <a:latin typeface="맑은 고딕"/>
               </a:rPr>
-              <a:t>기기가 없으면 교사가 미리 뽑아 둔 AI 답변 인쇄물 두 장을 모둠에 배부해 대조하게 한다.</a:t>
+              <a:t>나는 이 답을 믿을까</a:t>
+            </a:r>
+          </a:p>
+        </p:txBody>
+      </p:sp>
+      <p:sp>
+        <p:nvSpPr>
+          <p:cNvPr id="7" name="TextBox 6"/>
+          <p:cNvSpPr txBox="1"/>
+          <p:nvPr/>
+        </p:nvSpPr>
+        <p:spPr>
+          <a:xfrm>
+            <a:off x="822960" y="2468880"/>
+            <a:ext cx="10545775" cy="1463040"/>
+          </a:xfrm>
+          <a:prstGeom prst="rect">
+            <a:avLst/>
+          </a:prstGeom>
+          <a:noFill/>
+        </p:spPr>
+        <p:txBody>
+          <a:bodyPr wrap="square" anchor="t">
+            <a:spAutoFit/>
+          </a:bodyPr>
+          <a:lstStyle/>
+          <a:p>
+            <a:pPr algn="l">
+              <a:lnSpc>
+                <a:spcPct val="150000"/>
+              </a:lnSpc>
+            </a:pPr>
+            <a:r>
+              <a:rPr sz="2000" b="0">
+                <a:solidFill>
+                  <a:srgbClr val="6B7280"/>
+                </a:solidFill>
+                <a:latin typeface="맑은 고딕"/>
+              </a:rPr>
+              <a:t>그럴듯하게 쓰인 답 하나를 먼저 보여 주고 믿을지 말지 투표한다. 확인하기 전에는 사람도 속는다는 것을 겪는다.</a:t>
+            </a:r>
+          </a:p>
+        </p:txBody>
+      </p:sp>
+      <p:sp>
+        <p:nvSpPr>
+          <p:cNvPr id="8" name="TextBox 7"/>
+          <p:cNvSpPr txBox="1"/>
+          <p:nvPr/>
+        </p:nvSpPr>
+        <p:spPr>
+          <a:xfrm>
+            <a:off x="822960" y="4114800"/>
+            <a:ext cx="10545775" cy="1097280"/>
+          </a:xfrm>
+          <a:prstGeom prst="rect">
+            <a:avLst/>
+          </a:prstGeom>
+          <a:noFill/>
+        </p:spPr>
+        <p:txBody>
+          <a:bodyPr wrap="square" anchor="t">
+            <a:spAutoFit/>
+          </a:bodyPr>
+          <a:lstStyle/>
+          <a:p>
+            <a:pPr algn="l">
+              <a:lnSpc>
+                <a:spcPct val="125000"/>
+              </a:lnSpc>
+            </a:pPr>
+            <a:r>
+              <a:rPr sz="2600" b="1">
+                <a:solidFill>
+                  <a:srgbClr val="1F2937"/>
+                </a:solidFill>
+                <a:latin typeface="맑은 고딕"/>
+              </a:rPr>
+              <a:t>이 답을 믿어도 될까요? 무엇을 보고 그렇게 생각했나요?</a:t>
             </a:r>
           </a:p>
         </p:txBody>
@@ -6242,14 +8042,97 @@
       </p:sp>
       <p:sp>
         <p:nvSpPr>
-          <p:cNvPr id="3" name="TextBox 2"/>
+          <p:cNvPr id="3" name="Rectangle 2"/>
+          <p:cNvSpPr/>
+          <p:nvPr/>
+        </p:nvSpPr>
+        <p:spPr>
+          <a:xfrm>
+            <a:off x="10088575" y="640080"/>
+            <a:ext cx="1280160" cy="502920"/>
+          </a:xfrm>
+          <a:prstGeom prst="rect">
+            <a:avLst/>
+          </a:prstGeom>
+          <a:solidFill>
+            <a:srgbClr val="2563EB"/>
+          </a:solidFill>
+          <a:ln>
+            <a:noFill/>
+          </a:ln>
+          <a:effectLst/>
+        </p:spPr>
+        <p:style>
+          <a:lnRef idx="1">
+            <a:schemeClr val="accent1"/>
+          </a:lnRef>
+          <a:fillRef idx="3">
+            <a:schemeClr val="accent1"/>
+          </a:fillRef>
+          <a:effectRef idx="2">
+            <a:schemeClr val="accent1"/>
+          </a:effectRef>
+          <a:fontRef idx="minor">
+            <a:schemeClr val="lt1"/>
+          </a:fontRef>
+        </p:style>
+        <p:txBody>
+          <a:bodyPr rtlCol="0" anchor="ctr"/>
+          <a:lstStyle/>
+          <a:p>
+            <a:pPr algn="ctr"/>
+          </a:p>
+        </p:txBody>
+      </p:sp>
+      <p:sp>
+        <p:nvSpPr>
+          <p:cNvPr id="4" name="TextBox 3"/>
           <p:cNvSpPr txBox="1"/>
           <p:nvPr/>
         </p:nvSpPr>
         <p:spPr>
           <a:xfrm>
+            <a:off x="10088575" y="658368"/>
+            <a:ext cx="1280160" cy="457200"/>
+          </a:xfrm>
+          <a:prstGeom prst="rect">
+            <a:avLst/>
+          </a:prstGeom>
+          <a:noFill/>
+        </p:spPr>
+        <p:txBody>
+          <a:bodyPr wrap="square" anchor="t">
+            <a:spAutoFit/>
+          </a:bodyPr>
+          <a:lstStyle/>
+          <a:p>
+            <a:pPr algn="ctr">
+              <a:lnSpc>
+                <a:spcPct val="125000"/>
+              </a:lnSpc>
+            </a:pPr>
+            <a:r>
+              <a:rPr sz="2000" b="1">
+                <a:solidFill>
+                  <a:srgbClr val="FFFFFF"/>
+                </a:solidFill>
+                <a:latin typeface="맑은 고딕"/>
+              </a:rPr>
+              <a:t>11분</a:t>
+            </a:r>
+          </a:p>
+        </p:txBody>
+      </p:sp>
+      <p:sp>
+        <p:nvSpPr>
+          <p:cNvPr id="5" name="TextBox 4"/>
+          <p:cNvSpPr txBox="1"/>
+          <p:nvPr/>
+        </p:nvSpPr>
+        <p:spPr>
+          <a:xfrm>
             <a:off x="822960" y="731520"/>
-            <a:ext cx="10545775" cy="548640"/>
+            <a:ext cx="8351215" cy="457200"/>
           </a:xfrm>
           <a:prstGeom prst="rect">
             <a:avLst/>
@@ -6268,27 +8151,27 @@
               </a:lnSpc>
             </a:pPr>
             <a:r>
-              <a:rPr sz="2000" b="1">
+              <a:rPr sz="1800" b="1">
                 <a:solidFill>
                   <a:srgbClr val="2563EB"/>
                 </a:solidFill>
                 <a:latin typeface="맑은 고딕"/>
               </a:rPr>
-              <a:t>정리 · 배움 정리</a:t>
-            </a:r>
-          </a:p>
-        </p:txBody>
-      </p:sp>
-      <p:sp>
-        <p:nvSpPr>
-          <p:cNvPr id="4" name="TextBox 3"/>
+              <a:t>2단계</a:t>
+            </a:r>
+          </a:p>
+        </p:txBody>
+      </p:sp>
+      <p:sp>
+        <p:nvSpPr>
+          <p:cNvPr id="6" name="TextBox 5"/>
           <p:cNvSpPr txBox="1"/>
           <p:nvPr/>
         </p:nvSpPr>
         <p:spPr>
           <a:xfrm>
-            <a:off x="822960" y="1828800"/>
-            <a:ext cx="10545775" cy="3291840"/>
+            <a:off x="822960" y="1371600"/>
+            <a:ext cx="10545775" cy="822960"/>
           </a:xfrm>
           <a:prstGeom prst="rect">
             <a:avLst/>
@@ -6303,17 +8186,95 @@
           <a:p>
             <a:pPr algn="l">
               <a:lnSpc>
-                <a:spcPct val="160000"/>
+                <a:spcPct val="125000"/>
               </a:lnSpc>
             </a:pPr>
             <a:r>
-              <a:rPr sz="2800" b="0">
+              <a:rPr sz="3600" b="1">
                 <a:solidFill>
                   <a:srgbClr val="1F2937"/>
                 </a:solidFill>
                 <a:latin typeface="맑은 고딕"/>
               </a:rPr>
-              <a:t>AI의 답을 받았을 때 가장 먼저 할 일은 무엇인가요?</a:t>
+              <a:t>같은 질문, 다른 답</a:t>
+            </a:r>
+          </a:p>
+        </p:txBody>
+      </p:sp>
+      <p:sp>
+        <p:nvSpPr>
+          <p:cNvPr id="7" name="TextBox 6"/>
+          <p:cNvSpPr txBox="1"/>
+          <p:nvPr/>
+        </p:nvSpPr>
+        <p:spPr>
+          <a:xfrm>
+            <a:off x="822960" y="2468880"/>
+            <a:ext cx="10545775" cy="1463040"/>
+          </a:xfrm>
+          <a:prstGeom prst="rect">
+            <a:avLst/>
+          </a:prstGeom>
+          <a:noFill/>
+        </p:spPr>
+        <p:txBody>
+          <a:bodyPr wrap="square" anchor="t">
+            <a:spAutoFit/>
+          </a:bodyPr>
+          <a:lstStyle/>
+          <a:p>
+            <a:pPr algn="l">
+              <a:lnSpc>
+                <a:spcPct val="150000"/>
+              </a:lnSpc>
+            </a:pPr>
+            <a:r>
+              <a:rPr sz="2000" b="0">
+                <a:solidFill>
+                  <a:srgbClr val="6B7280"/>
+                </a:solidFill>
+                <a:latin typeface="맑은 고딕"/>
+              </a:rPr>
+              <a:t>질문 다섯 개에 두 도구가 내놓은 답이 나란히 뜬다. 서로 다른 곳을 눌러 표시하고 어느 쪽이 의심스러운지 고른다.</a:t>
+            </a:r>
+          </a:p>
+        </p:txBody>
+      </p:sp>
+      <p:sp>
+        <p:nvSpPr>
+          <p:cNvPr id="8" name="TextBox 7"/>
+          <p:cNvSpPr txBox="1"/>
+          <p:nvPr/>
+        </p:nvSpPr>
+        <p:spPr>
+          <a:xfrm>
+            <a:off x="822960" y="4114800"/>
+            <a:ext cx="10545775" cy="1097280"/>
+          </a:xfrm>
+          <a:prstGeom prst="rect">
+            <a:avLst/>
+          </a:prstGeom>
+          <a:noFill/>
+        </p:spPr>
+        <p:txBody>
+          <a:bodyPr wrap="square" anchor="t">
+            <a:spAutoFit/>
+          </a:bodyPr>
+          <a:lstStyle/>
+          <a:p>
+            <a:pPr algn="l">
+              <a:lnSpc>
+                <a:spcPct val="125000"/>
+              </a:lnSpc>
+            </a:pPr>
+            <a:r>
+              <a:rPr sz="2600" b="1">
+                <a:solidFill>
+                  <a:srgbClr val="1F2937"/>
+                </a:solidFill>
+                <a:latin typeface="맑은 고딕"/>
+              </a:rPr>
+              <a:t>답이 다르다는 것은 무엇을 뜻할까요?</a:t>
             </a:r>
           </a:p>
         </p:txBody>

--- a/out/ppt/WISE_L02_수업.pptx
+++ b/out/ppt/WISE_L02_수업.pptx
@@ -5347,7 +5347,7 @@
                 </a:solidFill>
                 <a:latin typeface="맑은 고딕"/>
               </a:rPr>
-              <a:t>근거 자료와 대조하기</a:t>
+              <a:t>자료와 맞춰 보기</a:t>
             </a:r>
           </a:p>
         </p:txBody>
@@ -5648,7 +5648,7 @@
                 </a:solidFill>
                 <a:latin typeface="맑은 고딕"/>
               </a:rPr>
-              <a:t>환각 사례 카드 만들기</a:t>
+              <a:t>AI가 지어낸 말 카드 만들기</a:t>
             </a:r>
           </a:p>
         </p:txBody>
@@ -5949,7 +5949,7 @@
                 </a:solidFill>
                 <a:latin typeface="맑은 고딕"/>
               </a:rPr>
-              <a:t>판정 결과와 배움 정리</a:t>
+              <a:t>결과 보고 정리하기</a:t>
             </a:r>
           </a:p>
         </p:txBody>
@@ -7640,7 +7640,7 @@
                 </a:solidFill>
                 <a:latin typeface="맑은 고딕"/>
               </a:rPr>
-              <a:t>· 3단계 근거 자료와 대조하기</a:t>
+              <a:t>· 3단계 자료와 맞춰 보기</a:t>
             </a:r>
           </a:p>
           <a:p>
@@ -7656,7 +7656,7 @@
                 </a:solidFill>
                 <a:latin typeface="맑은 고딕"/>
               </a:rPr>
-              <a:t>· 4단계 환각 사례 카드 만들기</a:t>
+              <a:t>· 4단계 AI가 지어낸 말 카드 만들기</a:t>
             </a:r>
           </a:p>
           <a:p>
@@ -7672,7 +7672,7 @@
                 </a:solidFill>
                 <a:latin typeface="맑은 고딕"/>
               </a:rPr>
-              <a:t>· 5단계 판정 결과와 배움 정리</a:t>
+              <a:t>· 5단계 결과 보고 정리하기</a:t>
             </a:r>
           </a:p>
         </p:txBody>

--- a/out/ppt/WISE_L02_수업.pptx
+++ b/out/ppt/WISE_L02_수업.pptx
@@ -21,6 +21,14 @@
     <p:sldId id="269" r:id="rId21"/>
     <p:sldId id="270" r:id="rId22"/>
     <p:sldId id="271" r:id="rId23"/>
+    <p:sldId id="272" r:id="rId24"/>
+    <p:sldId id="273" r:id="rId25"/>
+    <p:sldId id="274" r:id="rId26"/>
+    <p:sldId id="275" r:id="rId27"/>
+    <p:sldId id="276" r:id="rId28"/>
+    <p:sldId id="277" r:id="rId29"/>
+    <p:sldId id="278" r:id="rId30"/>
+    <p:sldId id="279" r:id="rId31"/>
   </p:sldIdLst>
   <p:sldSz cx="12191695" cy="6858000" type="screen4x3"/>
   <p:notesSz cx="6858000" cy="9144000"/>
@@ -1127,7 +1135,232 @@
           <a:lstStyle/>
           <a:p>
             <a:r>
-              <a:t>오늘 배운 것을 학생이 한 문장으로 말하게 한다.</a:t>
+              <a:t>수업 시작 전에 방을 만들어 둔다.</a:t>
+            </a:r>
+          </a:p>
+          <a:p>
+            <a:r>
+              <a:t>학생에게는 방 번호와 닉네임만 알려 준다. 이름을 묻지 않는다.</a:t>
+            </a:r>
+          </a:p>
+        </p:txBody>
+      </p:sp>
+      <p:sp>
+        <p:nvSpPr>
+          <p:cNvPr id="4" name="Slide Number Placeholder 3"/>
+          <p:cNvSpPr>
+            <a:spLocks noGrp="1"/>
+          </p:cNvSpPr>
+          <p:nvPr>
+            <p:ph type="sldNum" idx="5" sz="quarter"/>
+          </p:nvPr>
+        </p:nvSpPr>
+        <p:spPr/>
+      </p:sp>
+    </p:spTree>
+  </p:cSld>
+  <p:clrMapOvr>
+    <a:masterClrMapping/>
+  </p:clrMapOvr>
+</p:notes>
+</file>
+
+<file path=ppt/notesSlides/notesSlide17.xml><?xml version="1.0" encoding="utf-8"?>
+<p:notes xmlns:a="http://schemas.openxmlformats.org/drawingml/2006/main" xmlns:p="http://schemas.openxmlformats.org/presentationml/2006/main" xmlns:r="http://schemas.openxmlformats.org/officeDocument/2006/relationships">
+  <p:cSld>
+    <p:spTree>
+      <p:nvGrpSpPr>
+        <p:cNvPr id="1" name=""/>
+        <p:cNvGrpSpPr/>
+        <p:nvPr/>
+      </p:nvGrpSpPr>
+      <p:grpSpPr>
+        <a:xfrm>
+          <a:off x="0" y="0"/>
+          <a:ext cx="0" cy="0"/>
+          <a:chOff x="0" y="0"/>
+          <a:chExt cx="0" cy="0"/>
+        </a:xfrm>
+      </p:grpSpPr>
+      <p:sp>
+        <p:nvSpPr>
+          <p:cNvPr id="2" name="Slide Image Placeholder 1"/>
+          <p:cNvSpPr>
+            <a:spLocks noGrp="1"/>
+          </p:cNvSpPr>
+          <p:nvPr>
+            <p:ph type="sldImg" idx="2"/>
+          </p:nvPr>
+        </p:nvSpPr>
+        <p:spPr/>
+      </p:sp>
+      <p:sp>
+        <p:nvSpPr>
+          <p:cNvPr id="3" name="Notes Placeholder 2"/>
+          <p:cNvSpPr>
+            <a:spLocks noGrp="1"/>
+          </p:cNvSpPr>
+          <p:nvPr>
+            <p:ph type="body" idx="3" sz="quarter"/>
+          </p:nvPr>
+        </p:nvSpPr>
+        <p:spPr/>
+        <p:txBody>
+          <a:bodyPr/>
+          <a:lstStyle/>
+          <a:p>
+            <a:r>
+              <a:t>학생 화면을 띄워 놓고 함께 입장한다.</a:t>
+            </a:r>
+          </a:p>
+        </p:txBody>
+      </p:sp>
+      <p:sp>
+        <p:nvSpPr>
+          <p:cNvPr id="4" name="Slide Number Placeholder 3"/>
+          <p:cNvSpPr>
+            <a:spLocks noGrp="1"/>
+          </p:cNvSpPr>
+          <p:nvPr>
+            <p:ph type="sldNum" idx="5" sz="quarter"/>
+          </p:nvPr>
+        </p:nvSpPr>
+        <p:spPr/>
+      </p:sp>
+    </p:spTree>
+  </p:cSld>
+  <p:clrMapOvr>
+    <a:masterClrMapping/>
+  </p:clrMapOvr>
+</p:notes>
+</file>
+
+<file path=ppt/notesSlides/notesSlide18.xml><?xml version="1.0" encoding="utf-8"?>
+<p:notes xmlns:a="http://schemas.openxmlformats.org/drawingml/2006/main" xmlns:p="http://schemas.openxmlformats.org/presentationml/2006/main" xmlns:r="http://schemas.openxmlformats.org/officeDocument/2006/relationships">
+  <p:cSld>
+    <p:spTree>
+      <p:nvGrpSpPr>
+        <p:cNvPr id="1" name=""/>
+        <p:cNvGrpSpPr/>
+        <p:nvPr/>
+      </p:nvGrpSpPr>
+      <p:grpSpPr>
+        <a:xfrm>
+          <a:off x="0" y="0"/>
+          <a:ext cx="0" cy="0"/>
+          <a:chOff x="0" y="0"/>
+          <a:chExt cx="0" cy="0"/>
+        </a:xfrm>
+      </p:grpSpPr>
+      <p:sp>
+        <p:nvSpPr>
+          <p:cNvPr id="2" name="Slide Image Placeholder 1"/>
+          <p:cNvSpPr>
+            <a:spLocks noGrp="1"/>
+          </p:cNvSpPr>
+          <p:nvPr>
+            <p:ph type="sldImg" idx="2"/>
+          </p:nvPr>
+        </p:nvSpPr>
+        <p:spPr/>
+      </p:sp>
+      <p:sp>
+        <p:nvSpPr>
+          <p:cNvPr id="3" name="Notes Placeholder 2"/>
+          <p:cNvSpPr>
+            <a:spLocks noGrp="1"/>
+          </p:cNvSpPr>
+          <p:nvPr>
+            <p:ph type="body" idx="3" sz="quarter"/>
+          </p:nvPr>
+        </p:nvSpPr>
+        <p:spPr/>
+        <p:txBody>
+          <a:bodyPr/>
+          <a:lstStyle/>
+          <a:p>
+            <a:r>
+              <a:t>이 화면에서 학생이 무엇을 하는지 먼저 말해 준다.</a:t>
+            </a:r>
+          </a:p>
+          <a:p>
+            <a:r>
+              <a:t>판단이 갈리는 자리에서 까닭을 묻는다.</a:t>
+            </a:r>
+          </a:p>
+        </p:txBody>
+      </p:sp>
+      <p:sp>
+        <p:nvSpPr>
+          <p:cNvPr id="4" name="Slide Number Placeholder 3"/>
+          <p:cNvSpPr>
+            <a:spLocks noGrp="1"/>
+          </p:cNvSpPr>
+          <p:nvPr>
+            <p:ph type="sldNum" idx="5" sz="quarter"/>
+          </p:nvPr>
+        </p:nvSpPr>
+        <p:spPr/>
+      </p:sp>
+    </p:spTree>
+  </p:cSld>
+  <p:clrMapOvr>
+    <a:masterClrMapping/>
+  </p:clrMapOvr>
+</p:notes>
+</file>
+
+<file path=ppt/notesSlides/notesSlide19.xml><?xml version="1.0" encoding="utf-8"?>
+<p:notes xmlns:a="http://schemas.openxmlformats.org/drawingml/2006/main" xmlns:p="http://schemas.openxmlformats.org/presentationml/2006/main" xmlns:r="http://schemas.openxmlformats.org/officeDocument/2006/relationships">
+  <p:cSld>
+    <p:spTree>
+      <p:nvGrpSpPr>
+        <p:cNvPr id="1" name=""/>
+        <p:cNvGrpSpPr/>
+        <p:nvPr/>
+      </p:nvGrpSpPr>
+      <p:grpSpPr>
+        <a:xfrm>
+          <a:off x="0" y="0"/>
+          <a:ext cx="0" cy="0"/>
+          <a:chOff x="0" y="0"/>
+          <a:chExt cx="0" cy="0"/>
+        </a:xfrm>
+      </p:grpSpPr>
+      <p:sp>
+        <p:nvSpPr>
+          <p:cNvPr id="2" name="Slide Image Placeholder 1"/>
+          <p:cNvSpPr>
+            <a:spLocks noGrp="1"/>
+          </p:cNvSpPr>
+          <p:nvPr>
+            <p:ph type="sldImg" idx="2"/>
+          </p:nvPr>
+        </p:nvSpPr>
+        <p:spPr/>
+      </p:sp>
+      <p:sp>
+        <p:nvSpPr>
+          <p:cNvPr id="3" name="Notes Placeholder 2"/>
+          <p:cNvSpPr>
+            <a:spLocks noGrp="1"/>
+          </p:cNvSpPr>
+          <p:nvPr>
+            <p:ph type="body" idx="3" sz="quarter"/>
+          </p:nvPr>
+        </p:nvSpPr>
+        <p:spPr/>
+        <p:txBody>
+          <a:bodyPr/>
+          <a:lstStyle/>
+          <a:p>
+            <a:r>
+              <a:t>이 화면에서 학생이 무엇을 하는지 먼저 말해 준다.</a:t>
+            </a:r>
+          </a:p>
+          <a:p>
+            <a:r>
+              <a:t>판단이 갈리는 자리에서 까닭을 묻는다.</a:t>
             </a:r>
           </a:p>
         </p:txBody>
@@ -1198,6 +1431,371 @@
           <a:p>
             <a:r>
               <a:t>학습 문제를 함께 소리 내어 읽는다.</a:t>
+            </a:r>
+          </a:p>
+        </p:txBody>
+      </p:sp>
+      <p:sp>
+        <p:nvSpPr>
+          <p:cNvPr id="4" name="Slide Number Placeholder 3"/>
+          <p:cNvSpPr>
+            <a:spLocks noGrp="1"/>
+          </p:cNvSpPr>
+          <p:nvPr>
+            <p:ph type="sldNum" idx="5" sz="quarter"/>
+          </p:nvPr>
+        </p:nvSpPr>
+        <p:spPr/>
+      </p:sp>
+    </p:spTree>
+  </p:cSld>
+  <p:clrMapOvr>
+    <a:masterClrMapping/>
+  </p:clrMapOvr>
+</p:notes>
+</file>
+
+<file path=ppt/notesSlides/notesSlide20.xml><?xml version="1.0" encoding="utf-8"?>
+<p:notes xmlns:a="http://schemas.openxmlformats.org/drawingml/2006/main" xmlns:p="http://schemas.openxmlformats.org/presentationml/2006/main" xmlns:r="http://schemas.openxmlformats.org/officeDocument/2006/relationships">
+  <p:cSld>
+    <p:spTree>
+      <p:nvGrpSpPr>
+        <p:cNvPr id="1" name=""/>
+        <p:cNvGrpSpPr/>
+        <p:nvPr/>
+      </p:nvGrpSpPr>
+      <p:grpSpPr>
+        <a:xfrm>
+          <a:off x="0" y="0"/>
+          <a:ext cx="0" cy="0"/>
+          <a:chOff x="0" y="0"/>
+          <a:chExt cx="0" cy="0"/>
+        </a:xfrm>
+      </p:grpSpPr>
+      <p:sp>
+        <p:nvSpPr>
+          <p:cNvPr id="2" name="Slide Image Placeholder 1"/>
+          <p:cNvSpPr>
+            <a:spLocks noGrp="1"/>
+          </p:cNvSpPr>
+          <p:nvPr>
+            <p:ph type="sldImg" idx="2"/>
+          </p:nvPr>
+        </p:nvSpPr>
+        <p:spPr/>
+      </p:sp>
+      <p:sp>
+        <p:nvSpPr>
+          <p:cNvPr id="3" name="Notes Placeholder 2"/>
+          <p:cNvSpPr>
+            <a:spLocks noGrp="1"/>
+          </p:cNvSpPr>
+          <p:nvPr>
+            <p:ph type="body" idx="3" sz="quarter"/>
+          </p:nvPr>
+        </p:nvSpPr>
+        <p:spPr/>
+        <p:txBody>
+          <a:bodyPr/>
+          <a:lstStyle/>
+          <a:p>
+            <a:r>
+              <a:t>이 화면에서 학생이 무엇을 하는지 먼저 말해 준다.</a:t>
+            </a:r>
+          </a:p>
+          <a:p>
+            <a:r>
+              <a:t>판단이 갈리는 자리에서 까닭을 묻는다.</a:t>
+            </a:r>
+          </a:p>
+        </p:txBody>
+      </p:sp>
+      <p:sp>
+        <p:nvSpPr>
+          <p:cNvPr id="4" name="Slide Number Placeholder 3"/>
+          <p:cNvSpPr>
+            <a:spLocks noGrp="1"/>
+          </p:cNvSpPr>
+          <p:nvPr>
+            <p:ph type="sldNum" idx="5" sz="quarter"/>
+          </p:nvPr>
+        </p:nvSpPr>
+        <p:spPr/>
+      </p:sp>
+    </p:spTree>
+  </p:cSld>
+  <p:clrMapOvr>
+    <a:masterClrMapping/>
+  </p:clrMapOvr>
+</p:notes>
+</file>
+
+<file path=ppt/notesSlides/notesSlide21.xml><?xml version="1.0" encoding="utf-8"?>
+<p:notes xmlns:a="http://schemas.openxmlformats.org/drawingml/2006/main" xmlns:p="http://schemas.openxmlformats.org/presentationml/2006/main" xmlns:r="http://schemas.openxmlformats.org/officeDocument/2006/relationships">
+  <p:cSld>
+    <p:spTree>
+      <p:nvGrpSpPr>
+        <p:cNvPr id="1" name=""/>
+        <p:cNvGrpSpPr/>
+        <p:nvPr/>
+      </p:nvGrpSpPr>
+      <p:grpSpPr>
+        <a:xfrm>
+          <a:off x="0" y="0"/>
+          <a:ext cx="0" cy="0"/>
+          <a:chOff x="0" y="0"/>
+          <a:chExt cx="0" cy="0"/>
+        </a:xfrm>
+      </p:grpSpPr>
+      <p:sp>
+        <p:nvSpPr>
+          <p:cNvPr id="2" name="Slide Image Placeholder 1"/>
+          <p:cNvSpPr>
+            <a:spLocks noGrp="1"/>
+          </p:cNvSpPr>
+          <p:nvPr>
+            <p:ph type="sldImg" idx="2"/>
+          </p:nvPr>
+        </p:nvSpPr>
+        <p:spPr/>
+      </p:sp>
+      <p:sp>
+        <p:nvSpPr>
+          <p:cNvPr id="3" name="Notes Placeholder 2"/>
+          <p:cNvSpPr>
+            <a:spLocks noGrp="1"/>
+          </p:cNvSpPr>
+          <p:nvPr>
+            <p:ph type="body" idx="3" sz="quarter"/>
+          </p:nvPr>
+        </p:nvSpPr>
+        <p:spPr/>
+        <p:txBody>
+          <a:bodyPr/>
+          <a:lstStyle/>
+          <a:p>
+            <a:r>
+              <a:t>이 화면에서 학생이 무엇을 하는지 먼저 말해 준다.</a:t>
+            </a:r>
+          </a:p>
+          <a:p>
+            <a:r>
+              <a:t>판단이 갈리는 자리에서 까닭을 묻는다.</a:t>
+            </a:r>
+          </a:p>
+        </p:txBody>
+      </p:sp>
+      <p:sp>
+        <p:nvSpPr>
+          <p:cNvPr id="4" name="Slide Number Placeholder 3"/>
+          <p:cNvSpPr>
+            <a:spLocks noGrp="1"/>
+          </p:cNvSpPr>
+          <p:nvPr>
+            <p:ph type="sldNum" idx="5" sz="quarter"/>
+          </p:nvPr>
+        </p:nvSpPr>
+        <p:spPr/>
+      </p:sp>
+    </p:spTree>
+  </p:cSld>
+  <p:clrMapOvr>
+    <a:masterClrMapping/>
+  </p:clrMapOvr>
+</p:notes>
+</file>
+
+<file path=ppt/notesSlides/notesSlide22.xml><?xml version="1.0" encoding="utf-8"?>
+<p:notes xmlns:a="http://schemas.openxmlformats.org/drawingml/2006/main" xmlns:p="http://schemas.openxmlformats.org/presentationml/2006/main" xmlns:r="http://schemas.openxmlformats.org/officeDocument/2006/relationships">
+  <p:cSld>
+    <p:spTree>
+      <p:nvGrpSpPr>
+        <p:cNvPr id="1" name=""/>
+        <p:cNvGrpSpPr/>
+        <p:nvPr/>
+      </p:nvGrpSpPr>
+      <p:grpSpPr>
+        <a:xfrm>
+          <a:off x="0" y="0"/>
+          <a:ext cx="0" cy="0"/>
+          <a:chOff x="0" y="0"/>
+          <a:chExt cx="0" cy="0"/>
+        </a:xfrm>
+      </p:grpSpPr>
+      <p:sp>
+        <p:nvSpPr>
+          <p:cNvPr id="2" name="Slide Image Placeholder 1"/>
+          <p:cNvSpPr>
+            <a:spLocks noGrp="1"/>
+          </p:cNvSpPr>
+          <p:nvPr>
+            <p:ph type="sldImg" idx="2"/>
+          </p:nvPr>
+        </p:nvSpPr>
+        <p:spPr/>
+      </p:sp>
+      <p:sp>
+        <p:nvSpPr>
+          <p:cNvPr id="3" name="Notes Placeholder 2"/>
+          <p:cNvSpPr>
+            <a:spLocks noGrp="1"/>
+          </p:cNvSpPr>
+          <p:nvPr>
+            <p:ph type="body" idx="3" sz="quarter"/>
+          </p:nvPr>
+        </p:nvSpPr>
+        <p:spPr/>
+        <p:txBody>
+          <a:bodyPr/>
+          <a:lstStyle/>
+          <a:p>
+            <a:r>
+              <a:t>이 화면에서 학생이 무엇을 하는지 먼저 말해 준다.</a:t>
+            </a:r>
+          </a:p>
+          <a:p>
+            <a:r>
+              <a:t>판단이 갈리는 자리에서 까닭을 묻는다.</a:t>
+            </a:r>
+          </a:p>
+        </p:txBody>
+      </p:sp>
+      <p:sp>
+        <p:nvSpPr>
+          <p:cNvPr id="4" name="Slide Number Placeholder 3"/>
+          <p:cNvSpPr>
+            <a:spLocks noGrp="1"/>
+          </p:cNvSpPr>
+          <p:nvPr>
+            <p:ph type="sldNum" idx="5" sz="quarter"/>
+          </p:nvPr>
+        </p:nvSpPr>
+        <p:spPr/>
+      </p:sp>
+    </p:spTree>
+  </p:cSld>
+  <p:clrMapOvr>
+    <a:masterClrMapping/>
+  </p:clrMapOvr>
+</p:notes>
+</file>
+
+<file path=ppt/notesSlides/notesSlide23.xml><?xml version="1.0" encoding="utf-8"?>
+<p:notes xmlns:a="http://schemas.openxmlformats.org/drawingml/2006/main" xmlns:p="http://schemas.openxmlformats.org/presentationml/2006/main" xmlns:r="http://schemas.openxmlformats.org/officeDocument/2006/relationships">
+  <p:cSld>
+    <p:spTree>
+      <p:nvGrpSpPr>
+        <p:cNvPr id="1" name=""/>
+        <p:cNvGrpSpPr/>
+        <p:nvPr/>
+      </p:nvGrpSpPr>
+      <p:grpSpPr>
+        <a:xfrm>
+          <a:off x="0" y="0"/>
+          <a:ext cx="0" cy="0"/>
+          <a:chOff x="0" y="0"/>
+          <a:chExt cx="0" cy="0"/>
+        </a:xfrm>
+      </p:grpSpPr>
+      <p:sp>
+        <p:nvSpPr>
+          <p:cNvPr id="2" name="Slide Image Placeholder 1"/>
+          <p:cNvSpPr>
+            <a:spLocks noGrp="1"/>
+          </p:cNvSpPr>
+          <p:nvPr>
+            <p:ph type="sldImg" idx="2"/>
+          </p:nvPr>
+        </p:nvSpPr>
+        <p:spPr/>
+      </p:sp>
+      <p:sp>
+        <p:nvSpPr>
+          <p:cNvPr id="3" name="Notes Placeholder 2"/>
+          <p:cNvSpPr>
+            <a:spLocks noGrp="1"/>
+          </p:cNvSpPr>
+          <p:nvPr>
+            <p:ph type="body" idx="3" sz="quarter"/>
+          </p:nvPr>
+        </p:nvSpPr>
+        <p:spPr/>
+        <p:txBody>
+          <a:bodyPr/>
+          <a:lstStyle/>
+          <a:p>
+            <a:r>
+              <a:t>제출이 모이면 갈린 항목부터 함께 본다.</a:t>
+            </a:r>
+          </a:p>
+        </p:txBody>
+      </p:sp>
+      <p:sp>
+        <p:nvSpPr>
+          <p:cNvPr id="4" name="Slide Number Placeholder 3"/>
+          <p:cNvSpPr>
+            <a:spLocks noGrp="1"/>
+          </p:cNvSpPr>
+          <p:nvPr>
+            <p:ph type="sldNum" idx="5" sz="quarter"/>
+          </p:nvPr>
+        </p:nvSpPr>
+        <p:spPr/>
+      </p:sp>
+    </p:spTree>
+  </p:cSld>
+  <p:clrMapOvr>
+    <a:masterClrMapping/>
+  </p:clrMapOvr>
+</p:notes>
+</file>
+
+<file path=ppt/notesSlides/notesSlide24.xml><?xml version="1.0" encoding="utf-8"?>
+<p:notes xmlns:a="http://schemas.openxmlformats.org/drawingml/2006/main" xmlns:p="http://schemas.openxmlformats.org/presentationml/2006/main" xmlns:r="http://schemas.openxmlformats.org/officeDocument/2006/relationships">
+  <p:cSld>
+    <p:spTree>
+      <p:nvGrpSpPr>
+        <p:cNvPr id="1" name=""/>
+        <p:cNvGrpSpPr/>
+        <p:nvPr/>
+      </p:nvGrpSpPr>
+      <p:grpSpPr>
+        <a:xfrm>
+          <a:off x="0" y="0"/>
+          <a:ext cx="0" cy="0"/>
+          <a:chOff x="0" y="0"/>
+          <a:chExt cx="0" cy="0"/>
+        </a:xfrm>
+      </p:grpSpPr>
+      <p:sp>
+        <p:nvSpPr>
+          <p:cNvPr id="2" name="Slide Image Placeholder 1"/>
+          <p:cNvSpPr>
+            <a:spLocks noGrp="1"/>
+          </p:cNvSpPr>
+          <p:nvPr>
+            <p:ph type="sldImg" idx="2"/>
+          </p:nvPr>
+        </p:nvSpPr>
+        <p:spPr/>
+      </p:sp>
+      <p:sp>
+        <p:nvSpPr>
+          <p:cNvPr id="3" name="Notes Placeholder 2"/>
+          <p:cNvSpPr>
+            <a:spLocks noGrp="1"/>
+          </p:cNvSpPr>
+          <p:nvPr>
+            <p:ph type="body" idx="3" sz="quarter"/>
+          </p:nvPr>
+        </p:nvSpPr>
+        <p:spPr/>
+        <p:txBody>
+          <a:bodyPr/>
+          <a:lstStyle/>
+          <a:p>
+            <a:r>
+              <a:t>오늘 배운 것을 학생이 한 문장으로 말하게 한다.</a:t>
             </a:r>
           </a:p>
         </p:txBody>
@@ -5347,7 +5945,7 @@
                 </a:solidFill>
                 <a:latin typeface="맑은 고딕"/>
               </a:rPr>
-              <a:t>자료와 맞춰 보기</a:t>
+              <a:t>근거 자료와 대조하기</a:t>
             </a:r>
           </a:p>
         </p:txBody>
@@ -5648,7 +6246,7 @@
                 </a:solidFill>
                 <a:latin typeface="맑은 고딕"/>
               </a:rPr>
-              <a:t>AI가 지어낸 말 카드 만들기</a:t>
+              <a:t>환각 사례 카드 만들기</a:t>
             </a:r>
           </a:p>
         </p:txBody>
@@ -5949,7 +6547,7 @@
                 </a:solidFill>
                 <a:latin typeface="맑은 고딕"/>
               </a:rPr>
-              <a:t>결과 보고 정리하기</a:t>
+              <a:t>판정 결과와 배움 정리</a:t>
             </a:r>
           </a:p>
         </p:txBody>
@@ -6522,7 +7120,7 @@
         </p:nvSpPr>
         <p:spPr>
           <a:xfrm>
-            <a:off x="822960" y="914400"/>
+            <a:off x="822960" y="731520"/>
             <a:ext cx="10545775" cy="548640"/>
           </a:xfrm>
           <a:prstGeom prst="rect">
@@ -6548,7 +7146,7 @@
                 </a:solidFill>
                 <a:latin typeface="맑은 고딕"/>
               </a:rPr>
-              <a:t>오늘의 배움</a:t>
+              <a:t>웹앱으로 합니다</a:t>
             </a:r>
           </a:p>
         </p:txBody>
@@ -6561,8 +7159,283 @@
         </p:nvSpPr>
         <p:spPr>
           <a:xfrm>
-            <a:off x="822960" y="1828800"/>
-            <a:ext cx="10545775" cy="2926080"/>
+            <a:off x="822960" y="1463040"/>
+            <a:ext cx="6766560" cy="1097280"/>
+          </a:xfrm>
+          <a:prstGeom prst="rect">
+            <a:avLst/>
+          </a:prstGeom>
+          <a:noFill/>
+        </p:spPr>
+        <p:txBody>
+          <a:bodyPr wrap="square" anchor="t">
+            <a:spAutoFit/>
+          </a:bodyPr>
+          <a:lstStyle/>
+          <a:p>
+            <a:pPr algn="l">
+              <a:lnSpc>
+                <a:spcPct val="125000"/>
+              </a:lnSpc>
+            </a:pPr>
+            <a:r>
+              <a:rPr sz="4000" b="1">
+                <a:solidFill>
+                  <a:srgbClr val="1F2937"/>
+                </a:solidFill>
+                <a:latin typeface="맑은 고딕"/>
+              </a:rPr>
+              <a:t>AI 검증 실험실</a:t>
+            </a:r>
+          </a:p>
+        </p:txBody>
+      </p:sp>
+      <p:sp>
+        <p:nvSpPr>
+          <p:cNvPr id="5" name="TextBox 4"/>
+          <p:cNvSpPr txBox="1"/>
+          <p:nvPr/>
+        </p:nvSpPr>
+        <p:spPr>
+          <a:xfrm>
+            <a:off x="822960" y="2651760"/>
+            <a:ext cx="6766560" cy="2194560"/>
+          </a:xfrm>
+          <a:prstGeom prst="rect">
+            <a:avLst/>
+          </a:prstGeom>
+          <a:noFill/>
+        </p:spPr>
+        <p:txBody>
+          <a:bodyPr wrap="square" anchor="t">
+            <a:spAutoFit/>
+          </a:bodyPr>
+          <a:lstStyle/>
+          <a:p>
+            <a:pPr algn="l">
+              <a:lnSpc>
+                <a:spcPct val="150000"/>
+              </a:lnSpc>
+            </a:pPr>
+            <a:r>
+              <a:rPr sz="1800" b="0">
+                <a:solidFill>
+                  <a:srgbClr val="1F2937"/>
+                </a:solidFill>
+                <a:latin typeface="맑은 고딕"/>
+              </a:rPr>
+              <a:t>같은 질문에 두 도구가 내놓은 답을 나란히 놓고 다른 곳을 찾은 뒤, 앱 안에 든 근거 자료와 대조해 검증 3단계를 밟는다. 무엇이 환각이었는지 판정하고 사례 카드로 남긴다.</a:t>
+            </a:r>
+          </a:p>
+          <a:p>
+            <a:pPr algn="l">
+              <a:lnSpc>
+                <a:spcPct val="150000"/>
+              </a:lnSpc>
+            </a:pPr>
+            <a:r>
+              <a:rPr sz="1800" b="0">
+                <a:solidFill>
+                  <a:srgbClr val="1F2937"/>
+                </a:solidFill>
+                <a:latin typeface="맑은 고딕"/>
+              </a:rPr>
+              <a:t>수업 전에 선생님 화면 → 새 방 만들기 → 방 번호를 칠판에 적는다.</a:t>
+            </a:r>
+          </a:p>
+          <a:p>
+            <a:pPr algn="l">
+              <a:lnSpc>
+                <a:spcPct val="150000"/>
+              </a:lnSpc>
+            </a:pPr>
+            <a:r>
+              <a:rPr sz="1800" b="0">
+                <a:solidFill>
+                  <a:srgbClr val="1F2937"/>
+                </a:solidFill>
+                <a:latin typeface="맑은 고딕"/>
+              </a:rPr>
+              <a:t>학생은 QR 을 찍거나 주소를 열고 방 번호와 닉네임을 넣는다.</a:t>
+            </a:r>
+          </a:p>
+          <a:p>
+            <a:pPr algn="l">
+              <a:lnSpc>
+                <a:spcPct val="150000"/>
+              </a:lnSpc>
+            </a:pPr>
+            <a:r>
+              <a:rPr sz="1800" b="0">
+                <a:solidFill>
+                  <a:srgbClr val="1F2937"/>
+                </a:solidFill>
+                <a:latin typeface="맑은 고딕"/>
+              </a:rPr>
+              <a:t>https://legoschool.github.io/wise-ai/webapp/L02/</a:t>
+            </a:r>
+          </a:p>
+        </p:txBody>
+      </p:sp>
+      <p:pic>
+        <p:nvPicPr>
+          <p:cNvPr id="6" name="Picture 5" descr="L02.png"/>
+          <p:cNvPicPr>
+            <a:picLocks noChangeAspect="1"/>
+          </p:cNvPicPr>
+          <p:nvPr/>
+        </p:nvPicPr>
+        <p:blipFill>
+          <a:blip r:embed="rId2"/>
+          <a:stretch>
+            <a:fillRect/>
+          </a:stretch>
+        </p:blipFill>
+        <p:spPr>
+          <a:xfrm>
+            <a:off x="8412480" y="1828800"/>
+            <a:ext cx="2743200" cy="2743200"/>
+          </a:xfrm>
+          <a:prstGeom prst="rect">
+            <a:avLst/>
+          </a:prstGeom>
+        </p:spPr>
+      </p:pic>
+    </p:spTree>
+  </p:cSld>
+  <p:clrMapOvr>
+    <a:masterClrMapping/>
+  </p:clrMapOvr>
+</p:sld>
+</file>
+
+<file path=ppt/slides/slide17.xml><?xml version="1.0" encoding="utf-8"?>
+<p:sld xmlns:a="http://schemas.openxmlformats.org/drawingml/2006/main" xmlns:p="http://schemas.openxmlformats.org/presentationml/2006/main" xmlns:r="http://schemas.openxmlformats.org/officeDocument/2006/relationships">
+  <p:cSld>
+    <p:spTree>
+      <p:nvGrpSpPr>
+        <p:cNvPr id="1" name=""/>
+        <p:cNvGrpSpPr/>
+        <p:nvPr/>
+      </p:nvGrpSpPr>
+      <p:grpSpPr/>
+      <p:sp>
+        <p:nvSpPr>
+          <p:cNvPr id="2" name="Rectangle 1"/>
+          <p:cNvSpPr/>
+          <p:nvPr/>
+        </p:nvSpPr>
+        <p:spPr>
+          <a:xfrm>
+            <a:off x="0" y="0"/>
+            <a:ext cx="201168" cy="6858000"/>
+          </a:xfrm>
+          <a:prstGeom prst="rect">
+            <a:avLst/>
+          </a:prstGeom>
+          <a:solidFill>
+            <a:srgbClr val="2563EB"/>
+          </a:solidFill>
+          <a:ln>
+            <a:noFill/>
+          </a:ln>
+          <a:effectLst/>
+        </p:spPr>
+        <p:style>
+          <a:lnRef idx="1">
+            <a:schemeClr val="accent1"/>
+          </a:lnRef>
+          <a:fillRef idx="3">
+            <a:schemeClr val="accent1"/>
+          </a:fillRef>
+          <a:effectRef idx="2">
+            <a:schemeClr val="accent1"/>
+          </a:effectRef>
+          <a:fontRef idx="minor">
+            <a:schemeClr val="lt1"/>
+          </a:fontRef>
+        </p:style>
+        <p:txBody>
+          <a:bodyPr rtlCol="0" anchor="ctr"/>
+          <a:lstStyle/>
+          <a:p>
+            <a:pPr algn="ctr"/>
+          </a:p>
+        </p:txBody>
+      </p:sp>
+      <p:sp>
+        <p:nvSpPr>
+          <p:cNvPr id="3" name="TextBox 2"/>
+          <p:cNvSpPr txBox="1"/>
+          <p:nvPr/>
+        </p:nvSpPr>
+        <p:spPr>
+          <a:xfrm>
+            <a:off x="822960" y="640080"/>
+            <a:ext cx="10545775" cy="548640"/>
+          </a:xfrm>
+          <a:prstGeom prst="rect">
+            <a:avLst/>
+          </a:prstGeom>
+          <a:noFill/>
+        </p:spPr>
+        <p:txBody>
+          <a:bodyPr wrap="square" anchor="t">
+            <a:spAutoFit/>
+          </a:bodyPr>
+          <a:lstStyle/>
+          <a:p>
+            <a:pPr algn="l">
+              <a:lnSpc>
+                <a:spcPct val="125000"/>
+              </a:lnSpc>
+            </a:pPr>
+            <a:r>
+              <a:rPr sz="2000" b="1">
+                <a:solidFill>
+                  <a:srgbClr val="2563EB"/>
+                </a:solidFill>
+                <a:latin typeface="맑은 고딕"/>
+              </a:rPr>
+              <a:t>학생 입장 화면</a:t>
+            </a:r>
+          </a:p>
+        </p:txBody>
+      </p:sp>
+      <p:pic>
+        <p:nvPicPr>
+          <p:cNvPr id="4" name="Picture 3" descr="L02_0_입장.png"/>
+          <p:cNvPicPr>
+            <a:picLocks noChangeAspect="1"/>
+          </p:cNvPicPr>
+          <p:nvPr/>
+        </p:nvPicPr>
+        <p:blipFill>
+          <a:blip r:embed="rId2"/>
+          <a:stretch>
+            <a:fillRect/>
+          </a:stretch>
+        </p:blipFill>
+        <p:spPr>
+          <a:xfrm>
+            <a:off x="822960" y="1280160"/>
+            <a:ext cx="4293704" cy="4937760"/>
+          </a:xfrm>
+          <a:prstGeom prst="rect">
+            <a:avLst/>
+          </a:prstGeom>
+        </p:spPr>
+      </p:pic>
+      <p:sp>
+        <p:nvSpPr>
+          <p:cNvPr id="5" name="TextBox 4"/>
+          <p:cNvSpPr txBox="1"/>
+          <p:nvPr/>
+        </p:nvSpPr>
+        <p:spPr>
+          <a:xfrm>
+            <a:off x="6949440" y="1463040"/>
+            <a:ext cx="4754880" cy="3291840"/>
           </a:xfrm>
           <a:prstGeom prst="rect">
             <a:avLst/>
@@ -6581,13 +7454,13 @@
               </a:lnSpc>
             </a:pPr>
             <a:r>
-              <a:rPr sz="2400" b="0">
+              <a:rPr sz="2000" b="0">
                 <a:solidFill>
                   <a:srgbClr val="1F2937"/>
                 </a:solidFill>
                 <a:latin typeface="맑은 고딕"/>
               </a:rPr>
-              <a:t>· AI는 사실이 아닌 것을 사실처럼 만들어 낼 수 있고, 출처 확인과 교차 검증으로 이를 가려낼 수 있다.</a:t>
+              <a:t>방 번호 여섯 자리와 닉네임만 넣는다.</a:t>
             </a:r>
           </a:p>
           <a:p>
@@ -6597,27 +7470,105 @@
               </a:lnSpc>
             </a:pPr>
             <a:r>
-              <a:rPr sz="2400" b="0">
+              <a:rPr sz="2000" b="0">
                 <a:solidFill>
                   <a:srgbClr val="1F2937"/>
                 </a:solidFill>
                 <a:latin typeface="맑은 고딕"/>
               </a:rPr>
-              <a:t>· 같은 질문이라도 묻는 방식과 상황에 따라 AI의 답이 달라진다.</a:t>
-            </a:r>
-          </a:p>
-        </p:txBody>
-      </p:sp>
-      <p:sp>
-        <p:nvSpPr>
-          <p:cNvPr id="5" name="TextBox 4"/>
+              <a:t>나만 아는 숫자 네 자리는 사전과 사후 설문을 잇는 데만 쓴다.</a:t>
+            </a:r>
+          </a:p>
+          <a:p>
+            <a:pPr algn="l">
+              <a:lnSpc>
+                <a:spcPct val="160000"/>
+              </a:lnSpc>
+            </a:pPr>
+            <a:r>
+              <a:rPr sz="2000" b="0">
+                <a:solidFill>
+                  <a:srgbClr val="1F2937"/>
+                </a:solidFill>
+                <a:latin typeface="맑은 고딕"/>
+              </a:rPr>
+              <a:t>기기가 없으면 둘러보기로 교사가 시연한다.</a:t>
+            </a:r>
+          </a:p>
+        </p:txBody>
+      </p:sp>
+    </p:spTree>
+  </p:cSld>
+  <p:clrMapOvr>
+    <a:masterClrMapping/>
+  </p:clrMapOvr>
+</p:sld>
+</file>
+
+<file path=ppt/slides/slide18.xml><?xml version="1.0" encoding="utf-8"?>
+<p:sld xmlns:a="http://schemas.openxmlformats.org/drawingml/2006/main" xmlns:p="http://schemas.openxmlformats.org/presentationml/2006/main" xmlns:r="http://schemas.openxmlformats.org/officeDocument/2006/relationships">
+  <p:cSld>
+    <p:spTree>
+      <p:nvGrpSpPr>
+        <p:cNvPr id="1" name=""/>
+        <p:cNvGrpSpPr/>
+        <p:nvPr/>
+      </p:nvGrpSpPr>
+      <p:grpSpPr/>
+      <p:sp>
+        <p:nvSpPr>
+          <p:cNvPr id="2" name="Rectangle 1"/>
+          <p:cNvSpPr/>
+          <p:nvPr/>
+        </p:nvSpPr>
+        <p:spPr>
+          <a:xfrm>
+            <a:off x="0" y="0"/>
+            <a:ext cx="201168" cy="6858000"/>
+          </a:xfrm>
+          <a:prstGeom prst="rect">
+            <a:avLst/>
+          </a:prstGeom>
+          <a:solidFill>
+            <a:srgbClr val="2563EB"/>
+          </a:solidFill>
+          <a:ln>
+            <a:noFill/>
+          </a:ln>
+          <a:effectLst/>
+        </p:spPr>
+        <p:style>
+          <a:lnRef idx="1">
+            <a:schemeClr val="accent1"/>
+          </a:lnRef>
+          <a:fillRef idx="3">
+            <a:schemeClr val="accent1"/>
+          </a:fillRef>
+          <a:effectRef idx="2">
+            <a:schemeClr val="accent1"/>
+          </a:effectRef>
+          <a:fontRef idx="minor">
+            <a:schemeClr val="lt1"/>
+          </a:fontRef>
+        </p:style>
+        <p:txBody>
+          <a:bodyPr rtlCol="0" anchor="ctr"/>
+          <a:lstStyle/>
+          <a:p>
+            <a:pPr algn="ctr"/>
+          </a:p>
+        </p:txBody>
+      </p:sp>
+      <p:sp>
+        <p:nvSpPr>
+          <p:cNvPr id="3" name="TextBox 2"/>
           <p:cNvSpPr txBox="1"/>
           <p:nvPr/>
         </p:nvSpPr>
         <p:spPr>
           <a:xfrm>
-            <a:off x="822960" y="5943600"/>
-            <a:ext cx="10545775" cy="457200"/>
+            <a:off x="822960" y="640080"/>
+            <a:ext cx="10545775" cy="548640"/>
           </a:xfrm>
           <a:prstGeom prst="rect">
             <a:avLst/>
@@ -6636,13 +7587,272 @@
               </a:lnSpc>
             </a:pPr>
             <a:r>
-              <a:rPr sz="1200" b="0">
+              <a:rPr sz="2000" b="1">
                 <a:solidFill>
-                  <a:srgbClr val="6B7280"/>
+                  <a:srgbClr val="2563EB"/>
                 </a:solidFill>
                 <a:latin typeface="맑은 고딕"/>
               </a:rPr>
-              <a:t>2026년 티처스랩 5기 교사연구회 A.N.D · CC BY-NC-SA</a:t>
+              <a:t>웹앱 1단계 · 허브</a:t>
+            </a:r>
+          </a:p>
+        </p:txBody>
+      </p:sp>
+      <p:pic>
+        <p:nvPicPr>
+          <p:cNvPr id="4" name="Picture 3" descr="L02_2_hub.png"/>
+          <p:cNvPicPr>
+            <a:picLocks noChangeAspect="1"/>
+          </p:cNvPicPr>
+          <p:nvPr/>
+        </p:nvPicPr>
+        <p:blipFill>
+          <a:blip r:embed="rId2"/>
+          <a:stretch>
+            <a:fillRect/>
+          </a:stretch>
+        </p:blipFill>
+        <p:spPr>
+          <a:xfrm>
+            <a:off x="822960" y="1280160"/>
+            <a:ext cx="3526971" cy="4937760"/>
+          </a:xfrm>
+          <a:prstGeom prst="rect">
+            <a:avLst/>
+          </a:prstGeom>
+        </p:spPr>
+      </p:pic>
+      <p:sp>
+        <p:nvSpPr>
+          <p:cNvPr id="5" name="TextBox 4"/>
+          <p:cNvSpPr txBox="1"/>
+          <p:nvPr/>
+        </p:nvSpPr>
+        <p:spPr>
+          <a:xfrm>
+            <a:off x="6949440" y="1645920"/>
+            <a:ext cx="4754880" cy="2926080"/>
+          </a:xfrm>
+          <a:prstGeom prst="rect">
+            <a:avLst/>
+          </a:prstGeom>
+          <a:noFill/>
+        </p:spPr>
+        <p:txBody>
+          <a:bodyPr wrap="square" anchor="t">
+            <a:spAutoFit/>
+          </a:bodyPr>
+          <a:lstStyle/>
+          <a:p>
+            <a:pPr algn="l">
+              <a:lnSpc>
+                <a:spcPct val="160000"/>
+              </a:lnSpc>
+            </a:pPr>
+            <a:r>
+              <a:rPr sz="2200" b="0">
+                <a:solidFill>
+                  <a:srgbClr val="1F2937"/>
+                </a:solidFill>
+                <a:latin typeface="맑은 고딕"/>
+              </a:rPr>
+              <a:t>1단계 나는 이 답을 믿을까</a:t>
+            </a:r>
+          </a:p>
+          <a:p>
+            <a:pPr algn="l">
+              <a:lnSpc>
+                <a:spcPct val="160000"/>
+              </a:lnSpc>
+            </a:pPr>
+            <a:r>
+              <a:rPr sz="2200" b="0">
+                <a:solidFill>
+                  <a:srgbClr val="1F2937"/>
+                </a:solidFill>
+                <a:latin typeface="맑은 고딕"/>
+              </a:rPr>
+              <a:t>학생이 여기서 남긴 것이 활동지와 이어진다.</a:t>
+            </a:r>
+          </a:p>
+        </p:txBody>
+      </p:sp>
+    </p:spTree>
+  </p:cSld>
+  <p:clrMapOvr>
+    <a:masterClrMapping/>
+  </p:clrMapOvr>
+</p:sld>
+</file>
+
+<file path=ppt/slides/slide19.xml><?xml version="1.0" encoding="utf-8"?>
+<p:sld xmlns:a="http://schemas.openxmlformats.org/drawingml/2006/main" xmlns:p="http://schemas.openxmlformats.org/presentationml/2006/main" xmlns:r="http://schemas.openxmlformats.org/officeDocument/2006/relationships">
+  <p:cSld>
+    <p:spTree>
+      <p:nvGrpSpPr>
+        <p:cNvPr id="1" name=""/>
+        <p:cNvGrpSpPr/>
+        <p:nvPr/>
+      </p:nvGrpSpPr>
+      <p:grpSpPr/>
+      <p:sp>
+        <p:nvSpPr>
+          <p:cNvPr id="2" name="Rectangle 1"/>
+          <p:cNvSpPr/>
+          <p:nvPr/>
+        </p:nvSpPr>
+        <p:spPr>
+          <a:xfrm>
+            <a:off x="0" y="0"/>
+            <a:ext cx="201168" cy="6858000"/>
+          </a:xfrm>
+          <a:prstGeom prst="rect">
+            <a:avLst/>
+          </a:prstGeom>
+          <a:solidFill>
+            <a:srgbClr val="2563EB"/>
+          </a:solidFill>
+          <a:ln>
+            <a:noFill/>
+          </a:ln>
+          <a:effectLst/>
+        </p:spPr>
+        <p:style>
+          <a:lnRef idx="1">
+            <a:schemeClr val="accent1"/>
+          </a:lnRef>
+          <a:fillRef idx="3">
+            <a:schemeClr val="accent1"/>
+          </a:fillRef>
+          <a:effectRef idx="2">
+            <a:schemeClr val="accent1"/>
+          </a:effectRef>
+          <a:fontRef idx="minor">
+            <a:schemeClr val="lt1"/>
+          </a:fontRef>
+        </p:style>
+        <p:txBody>
+          <a:bodyPr rtlCol="0" anchor="ctr"/>
+          <a:lstStyle/>
+          <a:p>
+            <a:pPr algn="ctr"/>
+          </a:p>
+        </p:txBody>
+      </p:sp>
+      <p:sp>
+        <p:nvSpPr>
+          <p:cNvPr id="3" name="TextBox 2"/>
+          <p:cNvSpPr txBox="1"/>
+          <p:nvPr/>
+        </p:nvSpPr>
+        <p:spPr>
+          <a:xfrm>
+            <a:off x="822960" y="640080"/>
+            <a:ext cx="10545775" cy="548640"/>
+          </a:xfrm>
+          <a:prstGeom prst="rect">
+            <a:avLst/>
+          </a:prstGeom>
+          <a:noFill/>
+        </p:spPr>
+        <p:txBody>
+          <a:bodyPr wrap="square" anchor="t">
+            <a:spAutoFit/>
+          </a:bodyPr>
+          <a:lstStyle/>
+          <a:p>
+            <a:pPr algn="l">
+              <a:lnSpc>
+                <a:spcPct val="125000"/>
+              </a:lnSpc>
+            </a:pPr>
+            <a:r>
+              <a:rPr sz="2000" b="1">
+                <a:solidFill>
+                  <a:srgbClr val="2563EB"/>
+                </a:solidFill>
+                <a:latin typeface="맑은 고딕"/>
+              </a:rPr>
+              <a:t>웹앱 2단계 · 훈련장</a:t>
+            </a:r>
+          </a:p>
+        </p:txBody>
+      </p:sp>
+      <p:pic>
+        <p:nvPicPr>
+          <p:cNvPr id="4" name="Picture 3" descr="L02_3_train.png"/>
+          <p:cNvPicPr>
+            <a:picLocks noChangeAspect="1"/>
+          </p:cNvPicPr>
+          <p:nvPr/>
+        </p:nvPicPr>
+        <p:blipFill>
+          <a:blip r:embed="rId2"/>
+          <a:stretch>
+            <a:fillRect/>
+          </a:stretch>
+        </p:blipFill>
+        <p:spPr>
+          <a:xfrm>
+            <a:off x="822960" y="1280160"/>
+            <a:ext cx="3526971" cy="4937760"/>
+          </a:xfrm>
+          <a:prstGeom prst="rect">
+            <a:avLst/>
+          </a:prstGeom>
+        </p:spPr>
+      </p:pic>
+      <p:sp>
+        <p:nvSpPr>
+          <p:cNvPr id="5" name="TextBox 4"/>
+          <p:cNvSpPr txBox="1"/>
+          <p:nvPr/>
+        </p:nvSpPr>
+        <p:spPr>
+          <a:xfrm>
+            <a:off x="6949440" y="1645920"/>
+            <a:ext cx="4754880" cy="2926080"/>
+          </a:xfrm>
+          <a:prstGeom prst="rect">
+            <a:avLst/>
+          </a:prstGeom>
+          <a:noFill/>
+        </p:spPr>
+        <p:txBody>
+          <a:bodyPr wrap="square" anchor="t">
+            <a:spAutoFit/>
+          </a:bodyPr>
+          <a:lstStyle/>
+          <a:p>
+            <a:pPr algn="l">
+              <a:lnSpc>
+                <a:spcPct val="160000"/>
+              </a:lnSpc>
+            </a:pPr>
+            <a:r>
+              <a:rPr sz="2200" b="0">
+                <a:solidFill>
+                  <a:srgbClr val="1F2937"/>
+                </a:solidFill>
+                <a:latin typeface="맑은 고딕"/>
+              </a:rPr>
+              <a:t>2단계 같은 질문, 다른 답</a:t>
+            </a:r>
+          </a:p>
+          <a:p>
+            <a:pPr algn="l">
+              <a:lnSpc>
+                <a:spcPct val="160000"/>
+              </a:lnSpc>
+            </a:pPr>
+            <a:r>
+              <a:rPr sz="2200" b="0">
+                <a:solidFill>
+                  <a:srgbClr val="1F2937"/>
+                </a:solidFill>
+                <a:latin typeface="맑은 고딕"/>
+              </a:rPr>
+              <a:t>학생이 여기서 남긴 것이 활동지와 이어진다.</a:t>
             </a:r>
           </a:p>
         </p:txBody>
@@ -6795,6 +8005,913 @@
 </p:sld>
 </file>
 
+<file path=ppt/slides/slide20.xml><?xml version="1.0" encoding="utf-8"?>
+<p:sld xmlns:a="http://schemas.openxmlformats.org/drawingml/2006/main" xmlns:p="http://schemas.openxmlformats.org/presentationml/2006/main" xmlns:r="http://schemas.openxmlformats.org/officeDocument/2006/relationships">
+  <p:cSld>
+    <p:spTree>
+      <p:nvGrpSpPr>
+        <p:cNvPr id="1" name=""/>
+        <p:cNvGrpSpPr/>
+        <p:nvPr/>
+      </p:nvGrpSpPr>
+      <p:grpSpPr/>
+      <p:sp>
+        <p:nvSpPr>
+          <p:cNvPr id="2" name="Rectangle 1"/>
+          <p:cNvSpPr/>
+          <p:nvPr/>
+        </p:nvSpPr>
+        <p:spPr>
+          <a:xfrm>
+            <a:off x="0" y="0"/>
+            <a:ext cx="201168" cy="6858000"/>
+          </a:xfrm>
+          <a:prstGeom prst="rect">
+            <a:avLst/>
+          </a:prstGeom>
+          <a:solidFill>
+            <a:srgbClr val="2563EB"/>
+          </a:solidFill>
+          <a:ln>
+            <a:noFill/>
+          </a:ln>
+          <a:effectLst/>
+        </p:spPr>
+        <p:style>
+          <a:lnRef idx="1">
+            <a:schemeClr val="accent1"/>
+          </a:lnRef>
+          <a:fillRef idx="3">
+            <a:schemeClr val="accent1"/>
+          </a:fillRef>
+          <a:effectRef idx="2">
+            <a:schemeClr val="accent1"/>
+          </a:effectRef>
+          <a:fontRef idx="minor">
+            <a:schemeClr val="lt1"/>
+          </a:fontRef>
+        </p:style>
+        <p:txBody>
+          <a:bodyPr rtlCol="0" anchor="ctr"/>
+          <a:lstStyle/>
+          <a:p>
+            <a:pPr algn="ctr"/>
+          </a:p>
+        </p:txBody>
+      </p:sp>
+      <p:sp>
+        <p:nvSpPr>
+          <p:cNvPr id="3" name="TextBox 2"/>
+          <p:cNvSpPr txBox="1"/>
+          <p:nvPr/>
+        </p:nvSpPr>
+        <p:spPr>
+          <a:xfrm>
+            <a:off x="822960" y="640080"/>
+            <a:ext cx="10545775" cy="548640"/>
+          </a:xfrm>
+          <a:prstGeom prst="rect">
+            <a:avLst/>
+          </a:prstGeom>
+          <a:noFill/>
+        </p:spPr>
+        <p:txBody>
+          <a:bodyPr wrap="square" anchor="t">
+            <a:spAutoFit/>
+          </a:bodyPr>
+          <a:lstStyle/>
+          <a:p>
+            <a:pPr algn="l">
+              <a:lnSpc>
+                <a:spcPct val="125000"/>
+              </a:lnSpc>
+            </a:pPr>
+            <a:r>
+              <a:rPr sz="2000" b="1">
+                <a:solidFill>
+                  <a:srgbClr val="2563EB"/>
+                </a:solidFill>
+                <a:latin typeface="맑은 고딕"/>
+              </a:rPr>
+              <a:t>웹앱 3단계 · verify</a:t>
+            </a:r>
+          </a:p>
+        </p:txBody>
+      </p:sp>
+      <p:pic>
+        <p:nvPicPr>
+          <p:cNvPr id="4" name="Picture 3" descr="L02_4_verify.png"/>
+          <p:cNvPicPr>
+            <a:picLocks noChangeAspect="1"/>
+          </p:cNvPicPr>
+          <p:nvPr/>
+        </p:nvPicPr>
+        <p:blipFill>
+          <a:blip r:embed="rId2"/>
+          <a:stretch>
+            <a:fillRect/>
+          </a:stretch>
+        </p:blipFill>
+        <p:spPr>
+          <a:xfrm>
+            <a:off x="822960" y="1280160"/>
+            <a:ext cx="3526971" cy="4937760"/>
+          </a:xfrm>
+          <a:prstGeom prst="rect">
+            <a:avLst/>
+          </a:prstGeom>
+        </p:spPr>
+      </p:pic>
+      <p:sp>
+        <p:nvSpPr>
+          <p:cNvPr id="5" name="TextBox 4"/>
+          <p:cNvSpPr txBox="1"/>
+          <p:nvPr/>
+        </p:nvSpPr>
+        <p:spPr>
+          <a:xfrm>
+            <a:off x="6949440" y="1645920"/>
+            <a:ext cx="4754880" cy="2926080"/>
+          </a:xfrm>
+          <a:prstGeom prst="rect">
+            <a:avLst/>
+          </a:prstGeom>
+          <a:noFill/>
+        </p:spPr>
+        <p:txBody>
+          <a:bodyPr wrap="square" anchor="t">
+            <a:spAutoFit/>
+          </a:bodyPr>
+          <a:lstStyle/>
+          <a:p>
+            <a:pPr algn="l">
+              <a:lnSpc>
+                <a:spcPct val="160000"/>
+              </a:lnSpc>
+            </a:pPr>
+            <a:r>
+              <a:rPr sz="2200" b="0">
+                <a:solidFill>
+                  <a:srgbClr val="1F2937"/>
+                </a:solidFill>
+                <a:latin typeface="맑은 고딕"/>
+              </a:rPr>
+              <a:t>3단계 근거 자료와 대조하기</a:t>
+            </a:r>
+          </a:p>
+          <a:p>
+            <a:pPr algn="l">
+              <a:lnSpc>
+                <a:spcPct val="160000"/>
+              </a:lnSpc>
+            </a:pPr>
+            <a:r>
+              <a:rPr sz="2200" b="0">
+                <a:solidFill>
+                  <a:srgbClr val="1F2937"/>
+                </a:solidFill>
+                <a:latin typeface="맑은 고딕"/>
+              </a:rPr>
+              <a:t>학생이 여기서 남긴 것이 활동지와 이어진다.</a:t>
+            </a:r>
+          </a:p>
+        </p:txBody>
+      </p:sp>
+    </p:spTree>
+  </p:cSld>
+  <p:clrMapOvr>
+    <a:masterClrMapping/>
+  </p:clrMapOvr>
+</p:sld>
+</file>
+
+<file path=ppt/slides/slide21.xml><?xml version="1.0" encoding="utf-8"?>
+<p:sld xmlns:a="http://schemas.openxmlformats.org/drawingml/2006/main" xmlns:p="http://schemas.openxmlformats.org/presentationml/2006/main" xmlns:r="http://schemas.openxmlformats.org/officeDocument/2006/relationships">
+  <p:cSld>
+    <p:spTree>
+      <p:nvGrpSpPr>
+        <p:cNvPr id="1" name=""/>
+        <p:cNvGrpSpPr/>
+        <p:nvPr/>
+      </p:nvGrpSpPr>
+      <p:grpSpPr/>
+      <p:sp>
+        <p:nvSpPr>
+          <p:cNvPr id="2" name="Rectangle 1"/>
+          <p:cNvSpPr/>
+          <p:nvPr/>
+        </p:nvSpPr>
+        <p:spPr>
+          <a:xfrm>
+            <a:off x="0" y="0"/>
+            <a:ext cx="201168" cy="6858000"/>
+          </a:xfrm>
+          <a:prstGeom prst="rect">
+            <a:avLst/>
+          </a:prstGeom>
+          <a:solidFill>
+            <a:srgbClr val="2563EB"/>
+          </a:solidFill>
+          <a:ln>
+            <a:noFill/>
+          </a:ln>
+          <a:effectLst/>
+        </p:spPr>
+        <p:style>
+          <a:lnRef idx="1">
+            <a:schemeClr val="accent1"/>
+          </a:lnRef>
+          <a:fillRef idx="3">
+            <a:schemeClr val="accent1"/>
+          </a:fillRef>
+          <a:effectRef idx="2">
+            <a:schemeClr val="accent1"/>
+          </a:effectRef>
+          <a:fontRef idx="minor">
+            <a:schemeClr val="lt1"/>
+          </a:fontRef>
+        </p:style>
+        <p:txBody>
+          <a:bodyPr rtlCol="0" anchor="ctr"/>
+          <a:lstStyle/>
+          <a:p>
+            <a:pPr algn="ctr"/>
+          </a:p>
+        </p:txBody>
+      </p:sp>
+      <p:sp>
+        <p:nvSpPr>
+          <p:cNvPr id="3" name="TextBox 2"/>
+          <p:cNvSpPr txBox="1"/>
+          <p:nvPr/>
+        </p:nvSpPr>
+        <p:spPr>
+          <a:xfrm>
+            <a:off x="822960" y="640080"/>
+            <a:ext cx="10545775" cy="548640"/>
+          </a:xfrm>
+          <a:prstGeom prst="rect">
+            <a:avLst/>
+          </a:prstGeom>
+          <a:noFill/>
+        </p:spPr>
+        <p:txBody>
+          <a:bodyPr wrap="square" anchor="t">
+            <a:spAutoFit/>
+          </a:bodyPr>
+          <a:lstStyle/>
+          <a:p>
+            <a:pPr algn="l">
+              <a:lnSpc>
+                <a:spcPct val="125000"/>
+              </a:lnSpc>
+            </a:pPr>
+            <a:r>
+              <a:rPr sz="2000" b="1">
+                <a:solidFill>
+                  <a:srgbClr val="2563EB"/>
+                </a:solidFill>
+                <a:latin typeface="맑은 고딕"/>
+              </a:rPr>
+              <a:t>웹앱 4단계 · hunt</a:t>
+            </a:r>
+          </a:p>
+        </p:txBody>
+      </p:sp>
+      <p:pic>
+        <p:nvPicPr>
+          <p:cNvPr id="4" name="Picture 3" descr="L02_5_hunt.png"/>
+          <p:cNvPicPr>
+            <a:picLocks noChangeAspect="1"/>
+          </p:cNvPicPr>
+          <p:nvPr/>
+        </p:nvPicPr>
+        <p:blipFill>
+          <a:blip r:embed="rId2"/>
+          <a:stretch>
+            <a:fillRect/>
+          </a:stretch>
+        </p:blipFill>
+        <p:spPr>
+          <a:xfrm>
+            <a:off x="822960" y="1280160"/>
+            <a:ext cx="3526971" cy="4937760"/>
+          </a:xfrm>
+          <a:prstGeom prst="rect">
+            <a:avLst/>
+          </a:prstGeom>
+        </p:spPr>
+      </p:pic>
+      <p:sp>
+        <p:nvSpPr>
+          <p:cNvPr id="5" name="TextBox 4"/>
+          <p:cNvSpPr txBox="1"/>
+          <p:nvPr/>
+        </p:nvSpPr>
+        <p:spPr>
+          <a:xfrm>
+            <a:off x="6949440" y="1645920"/>
+            <a:ext cx="4754880" cy="2926080"/>
+          </a:xfrm>
+          <a:prstGeom prst="rect">
+            <a:avLst/>
+          </a:prstGeom>
+          <a:noFill/>
+        </p:spPr>
+        <p:txBody>
+          <a:bodyPr wrap="square" anchor="t">
+            <a:spAutoFit/>
+          </a:bodyPr>
+          <a:lstStyle/>
+          <a:p>
+            <a:pPr algn="l">
+              <a:lnSpc>
+                <a:spcPct val="160000"/>
+              </a:lnSpc>
+            </a:pPr>
+            <a:r>
+              <a:rPr sz="2200" b="0">
+                <a:solidFill>
+                  <a:srgbClr val="1F2937"/>
+                </a:solidFill>
+                <a:latin typeface="맑은 고딕"/>
+              </a:rPr>
+              <a:t>4단계 환각 사례 카드 만들기</a:t>
+            </a:r>
+          </a:p>
+          <a:p>
+            <a:pPr algn="l">
+              <a:lnSpc>
+                <a:spcPct val="160000"/>
+              </a:lnSpc>
+            </a:pPr>
+            <a:r>
+              <a:rPr sz="2200" b="0">
+                <a:solidFill>
+                  <a:srgbClr val="1F2937"/>
+                </a:solidFill>
+                <a:latin typeface="맑은 고딕"/>
+              </a:rPr>
+              <a:t>학생이 여기서 남긴 것이 활동지와 이어진다.</a:t>
+            </a:r>
+          </a:p>
+        </p:txBody>
+      </p:sp>
+    </p:spTree>
+  </p:cSld>
+  <p:clrMapOvr>
+    <a:masterClrMapping/>
+  </p:clrMapOvr>
+</p:sld>
+</file>
+
+<file path=ppt/slides/slide22.xml><?xml version="1.0" encoding="utf-8"?>
+<p:sld xmlns:a="http://schemas.openxmlformats.org/drawingml/2006/main" xmlns:p="http://schemas.openxmlformats.org/presentationml/2006/main" xmlns:r="http://schemas.openxmlformats.org/officeDocument/2006/relationships">
+  <p:cSld>
+    <p:spTree>
+      <p:nvGrpSpPr>
+        <p:cNvPr id="1" name=""/>
+        <p:cNvGrpSpPr/>
+        <p:nvPr/>
+      </p:nvGrpSpPr>
+      <p:grpSpPr/>
+      <p:sp>
+        <p:nvSpPr>
+          <p:cNvPr id="2" name="Rectangle 1"/>
+          <p:cNvSpPr/>
+          <p:nvPr/>
+        </p:nvSpPr>
+        <p:spPr>
+          <a:xfrm>
+            <a:off x="0" y="0"/>
+            <a:ext cx="201168" cy="6858000"/>
+          </a:xfrm>
+          <a:prstGeom prst="rect">
+            <a:avLst/>
+          </a:prstGeom>
+          <a:solidFill>
+            <a:srgbClr val="2563EB"/>
+          </a:solidFill>
+          <a:ln>
+            <a:noFill/>
+          </a:ln>
+          <a:effectLst/>
+        </p:spPr>
+        <p:style>
+          <a:lnRef idx="1">
+            <a:schemeClr val="accent1"/>
+          </a:lnRef>
+          <a:fillRef idx="3">
+            <a:schemeClr val="accent1"/>
+          </a:fillRef>
+          <a:effectRef idx="2">
+            <a:schemeClr val="accent1"/>
+          </a:effectRef>
+          <a:fontRef idx="minor">
+            <a:schemeClr val="lt1"/>
+          </a:fontRef>
+        </p:style>
+        <p:txBody>
+          <a:bodyPr rtlCol="0" anchor="ctr"/>
+          <a:lstStyle/>
+          <a:p>
+            <a:pPr algn="ctr"/>
+          </a:p>
+        </p:txBody>
+      </p:sp>
+      <p:sp>
+        <p:nvSpPr>
+          <p:cNvPr id="3" name="TextBox 2"/>
+          <p:cNvSpPr txBox="1"/>
+          <p:nvPr/>
+        </p:nvSpPr>
+        <p:spPr>
+          <a:xfrm>
+            <a:off x="822960" y="640080"/>
+            <a:ext cx="10545775" cy="548640"/>
+          </a:xfrm>
+          <a:prstGeom prst="rect">
+            <a:avLst/>
+          </a:prstGeom>
+          <a:noFill/>
+        </p:spPr>
+        <p:txBody>
+          <a:bodyPr wrap="square" anchor="t">
+            <a:spAutoFit/>
+          </a:bodyPr>
+          <a:lstStyle/>
+          <a:p>
+            <a:pPr algn="l">
+              <a:lnSpc>
+                <a:spcPct val="125000"/>
+              </a:lnSpc>
+            </a:pPr>
+            <a:r>
+              <a:rPr sz="2000" b="1">
+                <a:solidFill>
+                  <a:srgbClr val="2563EB"/>
+                </a:solidFill>
+                <a:latin typeface="맑은 고딕"/>
+              </a:rPr>
+              <a:t>웹앱 5단계 · 우리 반과 견주기</a:t>
+            </a:r>
+          </a:p>
+        </p:txBody>
+      </p:sp>
+      <p:pic>
+        <p:nvPicPr>
+          <p:cNvPr id="4" name="Picture 3" descr="L02_6_class.png"/>
+          <p:cNvPicPr>
+            <a:picLocks noChangeAspect="1"/>
+          </p:cNvPicPr>
+          <p:nvPr/>
+        </p:nvPicPr>
+        <p:blipFill>
+          <a:blip r:embed="rId2"/>
+          <a:stretch>
+            <a:fillRect/>
+          </a:stretch>
+        </p:blipFill>
+        <p:spPr>
+          <a:xfrm>
+            <a:off x="822960" y="1280160"/>
+            <a:ext cx="3526971" cy="4937760"/>
+          </a:xfrm>
+          <a:prstGeom prst="rect">
+            <a:avLst/>
+          </a:prstGeom>
+        </p:spPr>
+      </p:pic>
+      <p:sp>
+        <p:nvSpPr>
+          <p:cNvPr id="5" name="TextBox 4"/>
+          <p:cNvSpPr txBox="1"/>
+          <p:nvPr/>
+        </p:nvSpPr>
+        <p:spPr>
+          <a:xfrm>
+            <a:off x="6949440" y="1645920"/>
+            <a:ext cx="4754880" cy="2926080"/>
+          </a:xfrm>
+          <a:prstGeom prst="rect">
+            <a:avLst/>
+          </a:prstGeom>
+          <a:noFill/>
+        </p:spPr>
+        <p:txBody>
+          <a:bodyPr wrap="square" anchor="t">
+            <a:spAutoFit/>
+          </a:bodyPr>
+          <a:lstStyle/>
+          <a:p>
+            <a:pPr algn="l">
+              <a:lnSpc>
+                <a:spcPct val="160000"/>
+              </a:lnSpc>
+            </a:pPr>
+            <a:r>
+              <a:rPr sz="2200" b="0">
+                <a:solidFill>
+                  <a:srgbClr val="1F2937"/>
+                </a:solidFill>
+                <a:latin typeface="맑은 고딕"/>
+              </a:rPr>
+              <a:t>5단계 판정 결과와 배움 정리</a:t>
+            </a:r>
+          </a:p>
+          <a:p>
+            <a:pPr algn="l">
+              <a:lnSpc>
+                <a:spcPct val="160000"/>
+              </a:lnSpc>
+            </a:pPr>
+            <a:r>
+              <a:rPr sz="2200" b="0">
+                <a:solidFill>
+                  <a:srgbClr val="1F2937"/>
+                </a:solidFill>
+                <a:latin typeface="맑은 고딕"/>
+              </a:rPr>
+              <a:t>학생이 여기서 남긴 것이 활동지와 이어진다.</a:t>
+            </a:r>
+          </a:p>
+        </p:txBody>
+      </p:sp>
+    </p:spTree>
+  </p:cSld>
+  <p:clrMapOvr>
+    <a:masterClrMapping/>
+  </p:clrMapOvr>
+</p:sld>
+</file>
+
+<file path=ppt/slides/slide23.xml><?xml version="1.0" encoding="utf-8"?>
+<p:sld xmlns:a="http://schemas.openxmlformats.org/drawingml/2006/main" xmlns:p="http://schemas.openxmlformats.org/presentationml/2006/main" xmlns:r="http://schemas.openxmlformats.org/officeDocument/2006/relationships">
+  <p:cSld>
+    <p:spTree>
+      <p:nvGrpSpPr>
+        <p:cNvPr id="1" name=""/>
+        <p:cNvGrpSpPr/>
+        <p:nvPr/>
+      </p:nvGrpSpPr>
+      <p:grpSpPr/>
+      <p:sp>
+        <p:nvSpPr>
+          <p:cNvPr id="2" name="Rectangle 1"/>
+          <p:cNvSpPr/>
+          <p:nvPr/>
+        </p:nvSpPr>
+        <p:spPr>
+          <a:xfrm>
+            <a:off x="0" y="0"/>
+            <a:ext cx="201168" cy="6858000"/>
+          </a:xfrm>
+          <a:prstGeom prst="rect">
+            <a:avLst/>
+          </a:prstGeom>
+          <a:solidFill>
+            <a:srgbClr val="2563EB"/>
+          </a:solidFill>
+          <a:ln>
+            <a:noFill/>
+          </a:ln>
+          <a:effectLst/>
+        </p:spPr>
+        <p:style>
+          <a:lnRef idx="1">
+            <a:schemeClr val="accent1"/>
+          </a:lnRef>
+          <a:fillRef idx="3">
+            <a:schemeClr val="accent1"/>
+          </a:fillRef>
+          <a:effectRef idx="2">
+            <a:schemeClr val="accent1"/>
+          </a:effectRef>
+          <a:fontRef idx="minor">
+            <a:schemeClr val="lt1"/>
+          </a:fontRef>
+        </p:style>
+        <p:txBody>
+          <a:bodyPr rtlCol="0" anchor="ctr"/>
+          <a:lstStyle/>
+          <a:p>
+            <a:pPr algn="ctr"/>
+          </a:p>
+        </p:txBody>
+      </p:sp>
+      <p:sp>
+        <p:nvSpPr>
+          <p:cNvPr id="3" name="TextBox 2"/>
+          <p:cNvSpPr txBox="1"/>
+          <p:nvPr/>
+        </p:nvSpPr>
+        <p:spPr>
+          <a:xfrm>
+            <a:off x="822960" y="914400"/>
+            <a:ext cx="10545775" cy="548640"/>
+          </a:xfrm>
+          <a:prstGeom prst="rect">
+            <a:avLst/>
+          </a:prstGeom>
+          <a:noFill/>
+        </p:spPr>
+        <p:txBody>
+          <a:bodyPr wrap="square" anchor="t">
+            <a:spAutoFit/>
+          </a:bodyPr>
+          <a:lstStyle/>
+          <a:p>
+            <a:pPr algn="l">
+              <a:lnSpc>
+                <a:spcPct val="125000"/>
+              </a:lnSpc>
+            </a:pPr>
+            <a:r>
+              <a:rPr sz="2000" b="1">
+                <a:solidFill>
+                  <a:srgbClr val="2563EB"/>
+                </a:solidFill>
+                <a:latin typeface="맑은 고딕"/>
+              </a:rPr>
+              <a:t>교사 화면</a:t>
+            </a:r>
+          </a:p>
+        </p:txBody>
+      </p:sp>
+      <p:sp>
+        <p:nvSpPr>
+          <p:cNvPr id="4" name="TextBox 3"/>
+          <p:cNvSpPr txBox="1"/>
+          <p:nvPr/>
+        </p:nvSpPr>
+        <p:spPr>
+          <a:xfrm>
+            <a:off x="822960" y="1828800"/>
+            <a:ext cx="10545775" cy="2926080"/>
+          </a:xfrm>
+          <a:prstGeom prst="rect">
+            <a:avLst/>
+          </a:prstGeom>
+          <a:noFill/>
+        </p:spPr>
+        <p:txBody>
+          <a:bodyPr wrap="square" anchor="t">
+            <a:spAutoFit/>
+          </a:bodyPr>
+          <a:lstStyle/>
+          <a:p>
+            <a:pPr algn="l">
+              <a:lnSpc>
+                <a:spcPct val="160000"/>
+              </a:lnSpc>
+            </a:pPr>
+            <a:r>
+              <a:rPr sz="2400" b="0">
+                <a:solidFill>
+                  <a:srgbClr val="1F2937"/>
+                </a:solidFill>
+                <a:latin typeface="맑은 고딕"/>
+              </a:rPr>
+              <a:t>문항별 판정 분포, 학급 정답률, 학생이 만든 환각 사례 카드 모음, 배움 문장</a:t>
+            </a:r>
+          </a:p>
+          <a:p>
+            <a:pPr algn="l">
+              <a:lnSpc>
+                <a:spcPct val="160000"/>
+              </a:lnSpc>
+            </a:pPr>
+            <a:r>
+              <a:rPr sz="2400" b="0">
+                <a:solidFill>
+                  <a:srgbClr val="1F2937"/>
+                </a:solidFill>
+                <a:latin typeface="맑은 고딕"/>
+              </a:rPr>
+              <a:t>결과 크게 띄우기를 누르면 학급 화면으로 함께 본다.</a:t>
+            </a:r>
+          </a:p>
+          <a:p>
+            <a:pPr algn="l">
+              <a:lnSpc>
+                <a:spcPct val="160000"/>
+              </a:lnSpc>
+            </a:pPr>
+            <a:r>
+              <a:rPr sz="2400" b="0">
+                <a:solidFill>
+                  <a:srgbClr val="1F2937"/>
+                </a:solidFill>
+                <a:latin typeface="맑은 고딕"/>
+              </a:rPr>
+              <a:t>CSV 로 내려받고, 수업이 끝나면 방을 잠근다.</a:t>
+            </a:r>
+          </a:p>
+        </p:txBody>
+      </p:sp>
+    </p:spTree>
+  </p:cSld>
+  <p:clrMapOvr>
+    <a:masterClrMapping/>
+  </p:clrMapOvr>
+</p:sld>
+</file>
+
+<file path=ppt/slides/slide24.xml><?xml version="1.0" encoding="utf-8"?>
+<p:sld xmlns:a="http://schemas.openxmlformats.org/drawingml/2006/main" xmlns:p="http://schemas.openxmlformats.org/presentationml/2006/main" xmlns:r="http://schemas.openxmlformats.org/officeDocument/2006/relationships">
+  <p:cSld>
+    <p:spTree>
+      <p:nvGrpSpPr>
+        <p:cNvPr id="1" name=""/>
+        <p:cNvGrpSpPr/>
+        <p:nvPr/>
+      </p:nvGrpSpPr>
+      <p:grpSpPr/>
+      <p:sp>
+        <p:nvSpPr>
+          <p:cNvPr id="2" name="Rectangle 1"/>
+          <p:cNvSpPr/>
+          <p:nvPr/>
+        </p:nvSpPr>
+        <p:spPr>
+          <a:xfrm>
+            <a:off x="0" y="0"/>
+            <a:ext cx="201168" cy="6858000"/>
+          </a:xfrm>
+          <a:prstGeom prst="rect">
+            <a:avLst/>
+          </a:prstGeom>
+          <a:solidFill>
+            <a:srgbClr val="2563EB"/>
+          </a:solidFill>
+          <a:ln>
+            <a:noFill/>
+          </a:ln>
+          <a:effectLst/>
+        </p:spPr>
+        <p:style>
+          <a:lnRef idx="1">
+            <a:schemeClr val="accent1"/>
+          </a:lnRef>
+          <a:fillRef idx="3">
+            <a:schemeClr val="accent1"/>
+          </a:fillRef>
+          <a:effectRef idx="2">
+            <a:schemeClr val="accent1"/>
+          </a:effectRef>
+          <a:fontRef idx="minor">
+            <a:schemeClr val="lt1"/>
+          </a:fontRef>
+        </p:style>
+        <p:txBody>
+          <a:bodyPr rtlCol="0" anchor="ctr"/>
+          <a:lstStyle/>
+          <a:p>
+            <a:pPr algn="ctr"/>
+          </a:p>
+        </p:txBody>
+      </p:sp>
+      <p:sp>
+        <p:nvSpPr>
+          <p:cNvPr id="3" name="TextBox 2"/>
+          <p:cNvSpPr txBox="1"/>
+          <p:nvPr/>
+        </p:nvSpPr>
+        <p:spPr>
+          <a:xfrm>
+            <a:off x="822960" y="914400"/>
+            <a:ext cx="10545775" cy="548640"/>
+          </a:xfrm>
+          <a:prstGeom prst="rect">
+            <a:avLst/>
+          </a:prstGeom>
+          <a:noFill/>
+        </p:spPr>
+        <p:txBody>
+          <a:bodyPr wrap="square" anchor="t">
+            <a:spAutoFit/>
+          </a:bodyPr>
+          <a:lstStyle/>
+          <a:p>
+            <a:pPr algn="l">
+              <a:lnSpc>
+                <a:spcPct val="125000"/>
+              </a:lnSpc>
+            </a:pPr>
+            <a:r>
+              <a:rPr sz="2000" b="1">
+                <a:solidFill>
+                  <a:srgbClr val="2563EB"/>
+                </a:solidFill>
+                <a:latin typeface="맑은 고딕"/>
+              </a:rPr>
+              <a:t>오늘의 배움</a:t>
+            </a:r>
+          </a:p>
+        </p:txBody>
+      </p:sp>
+      <p:sp>
+        <p:nvSpPr>
+          <p:cNvPr id="4" name="TextBox 3"/>
+          <p:cNvSpPr txBox="1"/>
+          <p:nvPr/>
+        </p:nvSpPr>
+        <p:spPr>
+          <a:xfrm>
+            <a:off x="822960" y="1828800"/>
+            <a:ext cx="10545775" cy="2926080"/>
+          </a:xfrm>
+          <a:prstGeom prst="rect">
+            <a:avLst/>
+          </a:prstGeom>
+          <a:noFill/>
+        </p:spPr>
+        <p:txBody>
+          <a:bodyPr wrap="square" anchor="t">
+            <a:spAutoFit/>
+          </a:bodyPr>
+          <a:lstStyle/>
+          <a:p>
+            <a:pPr algn="l">
+              <a:lnSpc>
+                <a:spcPct val="160000"/>
+              </a:lnSpc>
+            </a:pPr>
+            <a:r>
+              <a:rPr sz="2400" b="0">
+                <a:solidFill>
+                  <a:srgbClr val="1F2937"/>
+                </a:solidFill>
+                <a:latin typeface="맑은 고딕"/>
+              </a:rPr>
+              <a:t>· AI는 사실이 아닌 것을 사실처럼 만들어 낼 수 있고, 출처 확인과 교차 검증으로 이를 가려낼 수 있다.</a:t>
+            </a:r>
+          </a:p>
+          <a:p>
+            <a:pPr algn="l">
+              <a:lnSpc>
+                <a:spcPct val="160000"/>
+              </a:lnSpc>
+            </a:pPr>
+            <a:r>
+              <a:rPr sz="2400" b="0">
+                <a:solidFill>
+                  <a:srgbClr val="1F2937"/>
+                </a:solidFill>
+                <a:latin typeface="맑은 고딕"/>
+              </a:rPr>
+              <a:t>· 같은 질문이라도 묻는 방식과 상황에 따라 AI의 답이 달라진다.</a:t>
+            </a:r>
+          </a:p>
+        </p:txBody>
+      </p:sp>
+      <p:sp>
+        <p:nvSpPr>
+          <p:cNvPr id="5" name="TextBox 4"/>
+          <p:cNvSpPr txBox="1"/>
+          <p:nvPr/>
+        </p:nvSpPr>
+        <p:spPr>
+          <a:xfrm>
+            <a:off x="822960" y="5943600"/>
+            <a:ext cx="10545775" cy="457200"/>
+          </a:xfrm>
+          <a:prstGeom prst="rect">
+            <a:avLst/>
+          </a:prstGeom>
+          <a:noFill/>
+        </p:spPr>
+        <p:txBody>
+          <a:bodyPr wrap="square" anchor="t">
+            <a:spAutoFit/>
+          </a:bodyPr>
+          <a:lstStyle/>
+          <a:p>
+            <a:pPr algn="l">
+              <a:lnSpc>
+                <a:spcPct val="125000"/>
+              </a:lnSpc>
+            </a:pPr>
+            <a:r>
+              <a:rPr sz="1200" b="0">
+                <a:solidFill>
+                  <a:srgbClr val="6B7280"/>
+                </a:solidFill>
+                <a:latin typeface="맑은 고딕"/>
+              </a:rPr>
+              <a:t>2026년 티처스랩 5기 교사연구회 A.N.D · CC BY-NC-SA</a:t>
+            </a:r>
+          </a:p>
+        </p:txBody>
+      </p:sp>
+    </p:spTree>
+  </p:cSld>
+  <p:clrMapOvr>
+    <a:masterClrMapping/>
+  </p:clrMapOvr>
+</p:sld>
+</file>
+
 <file path=ppt/slides/slide3.xml><?xml version="1.0" encoding="utf-8"?>
 <p:sld xmlns:a="http://schemas.openxmlformats.org/drawingml/2006/main" xmlns:p="http://schemas.openxmlformats.org/presentationml/2006/main" xmlns:r="http://schemas.openxmlformats.org/officeDocument/2006/relationships">
   <p:cSld>
@@ -7640,7 +9757,7 @@
                 </a:solidFill>
                 <a:latin typeface="맑은 고딕"/>
               </a:rPr>
-              <a:t>· 3단계 자료와 맞춰 보기</a:t>
+              <a:t>· 3단계 근거 자료와 대조하기</a:t>
             </a:r>
           </a:p>
           <a:p>
@@ -7656,7 +9773,7 @@
                 </a:solidFill>
                 <a:latin typeface="맑은 고딕"/>
               </a:rPr>
-              <a:t>· 4단계 AI가 지어낸 말 카드 만들기</a:t>
+              <a:t>· 4단계 환각 사례 카드 만들기</a:t>
             </a:r>
           </a:p>
           <a:p>
@@ -7672,7 +9789,7 @@
                 </a:solidFill>
                 <a:latin typeface="맑은 고딕"/>
               </a:rPr>
-              <a:t>· 5단계 결과 보고 정리하기</a:t>
+              <a:t>· 5단계 판정 결과와 배움 정리</a:t>
             </a:r>
           </a:p>
         </p:txBody>

--- a/out/ppt/WISE_L02_수업.pptx
+++ b/out/ppt/WISE_L02_수업.pptx
@@ -5722,7 +5722,7 @@
                 </a:solidFill>
                 <a:latin typeface="맑은 고딕"/>
               </a:rPr>
-              <a:t>2026년 티처스랩 5기 교사연구회 A.N.D · CC BY-NC-SA</a:t>
+              <a:t>2026년 G-DEAL A.N.D · CC BY-NC-SA</a:t>
             </a:r>
           </a:p>
         </p:txBody>
@@ -8899,7 +8899,7 @@
                 </a:solidFill>
                 <a:latin typeface="맑은 고딕"/>
               </a:rPr>
-              <a:t>2026년 티처스랩 5기 교사연구회 A.N.D · CC BY-NC-SA</a:t>
+              <a:t>2026년 G-DEAL A.N.D · CC BY-NC-SA</a:t>
             </a:r>
           </a:p>
         </p:txBody>
